--- a/Assets/Templates/NBA Playoffs - 2026.pptx
+++ b/Assets/Templates/NBA Playoffs - 2026.pptx
@@ -14,7 +14,7 @@
     <p:handoutMasterId r:id="rId11"/>
   </p:handoutMasterIdLst>
   <p:sldIdLst>
-    <p:sldId id="2147473235" r:id="rId9"/>
+    <p:sldId id="2147473246" r:id="rId9"/>
   </p:sldIdLst>
   <p:sldSz cx="12192000" cy="6858000"/>
   <p:notesSz cx="6858000" cy="9144000"/>
@@ -138,59 +138,9 @@
 <file path=ppt/revisionInfo.xml><?xml version="1.0" encoding="utf-8"?>
 <p1510:revInfo xmlns:a="http://schemas.openxmlformats.org/drawingml/2006/main" xmlns:r="http://schemas.openxmlformats.org/officeDocument/2006/relationships" xmlns:p1510="http://schemas.microsoft.com/office/powerpoint/2015/10/main">
   <p1510:revLst>
-    <p1510:client id="{FD14C987-AAA0-CF26-75DC-230F7A82026C}" v="4" dt="2026-03-11T03:29:01.489"/>
+    <p1510:client id="{D1430409-6F21-49BD-BA3F-3A82C04F6F2A}" v="5" dt="2026-03-10T23:14:07.336"/>
   </p1510:revLst>
 </p1510:revInfo>
-</file>
-
-<file path=ppt/changesInfos/changesInfo1.xml><?xml version="1.0" encoding="utf-8"?>
-<pc:chgInfo xmlns:a="http://schemas.openxmlformats.org/drawingml/2006/main" xmlns:r="http://schemas.openxmlformats.org/officeDocument/2006/relationships" xmlns:ac="http://schemas.microsoft.com/office/drawing/2013/main/command" xmlns:pc="http://schemas.microsoft.com/office/powerpoint/2013/main/command">
-  <pc:docChgLst>
-    <pc:chgData name="Sparkman, Zach E" userId="S::zach.sparkman@charter.com::a0fa8067-9197-4cb4-b572-088af4ff6e51" providerId="AD" clId="Web-{FD14C987-AAA0-CF26-75DC-230F7A82026C}"/>
-    <pc:docChg chg="delSld modSld">
-      <pc:chgData name="Sparkman, Zach E" userId="S::zach.sparkman@charter.com::a0fa8067-9197-4cb4-b572-088af4ff6e51" providerId="AD" clId="Web-{FD14C987-AAA0-CF26-75DC-230F7A82026C}" dt="2026-03-11T03:29:01.489" v="3" actId="20577"/>
-      <pc:docMkLst>
-        <pc:docMk/>
-      </pc:docMkLst>
-      <pc:sldChg chg="del">
-        <pc:chgData name="Sparkman, Zach E" userId="S::zach.sparkman@charter.com::a0fa8067-9197-4cb4-b572-088af4ff6e51" providerId="AD" clId="Web-{FD14C987-AAA0-CF26-75DC-230F7A82026C}" dt="2026-03-11T03:28:52.161" v="0"/>
-        <pc:sldMkLst>
-          <pc:docMk/>
-          <pc:sldMk cId="1977702510" sldId="2147473208"/>
-        </pc:sldMkLst>
-      </pc:sldChg>
-      <pc:sldChg chg="del">
-        <pc:chgData name="Sparkman, Zach E" userId="S::zach.sparkman@charter.com::a0fa8067-9197-4cb4-b572-088af4ff6e51" providerId="AD" clId="Web-{FD14C987-AAA0-CF26-75DC-230F7A82026C}" dt="2026-03-11T03:28:52.989" v="1"/>
-        <pc:sldMkLst>
-          <pc:docMk/>
-          <pc:sldMk cId="3448017463" sldId="2147473220"/>
-        </pc:sldMkLst>
-      </pc:sldChg>
-      <pc:sldChg chg="modSp">
-        <pc:chgData name="Sparkman, Zach E" userId="S::zach.sparkman@charter.com::a0fa8067-9197-4cb4-b572-088af4ff6e51" providerId="AD" clId="Web-{FD14C987-AAA0-CF26-75DC-230F7A82026C}" dt="2026-03-11T03:29:01.489" v="3" actId="20577"/>
-        <pc:sldMkLst>
-          <pc:docMk/>
-          <pc:sldMk cId="1065980393" sldId="2147473235"/>
-        </pc:sldMkLst>
-        <pc:spChg chg="mod">
-          <ac:chgData name="Sparkman, Zach E" userId="S::zach.sparkman@charter.com::a0fa8067-9197-4cb4-b572-088af4ff6e51" providerId="AD" clId="Web-{FD14C987-AAA0-CF26-75DC-230F7A82026C}" dt="2026-03-11T03:29:01.489" v="3" actId="20577"/>
-          <ac:spMkLst>
-            <pc:docMk/>
-            <pc:sldMk cId="1065980393" sldId="2147473235"/>
-            <ac:spMk id="9" creationId="{2A54B189-26C2-19B8-4C6A-611613235212}"/>
-          </ac:spMkLst>
-        </pc:spChg>
-      </pc:sldChg>
-      <pc:sldChg chg="del">
-        <pc:chgData name="Sparkman, Zach E" userId="S::zach.sparkman@charter.com::a0fa8067-9197-4cb4-b572-088af4ff6e51" providerId="AD" clId="Web-{FD14C987-AAA0-CF26-75DC-230F7A82026C}" dt="2026-03-11T03:28:56.536" v="2"/>
-        <pc:sldMkLst>
-          <pc:docMk/>
-          <pc:sldMk cId="139504052" sldId="2147473236"/>
-        </pc:sldMkLst>
-      </pc:sldChg>
-    </pc:docChg>
-  </pc:docChgLst>
-</pc:chgInfo>
 </file>
 
 <file path=ppt/handoutMasters/handoutMaster1.xml><?xml version="1.0" encoding="utf-8"?>
@@ -287,7 +237,7 @@
           <a:p>
             <a:fld id="{D28EEBFE-8A87-DC4B-83D1-64E9257E4E50}" type="datetimeFigureOut">
               <a:rPr lang="en-US" smtClean="0"/>
-              <a:t>3/10/2026</a:t>
+              <a:t>3/24/2026</a:t>
             </a:fld>
             <a:endParaRPr lang="en-US" dirty="0"/>
           </a:p>
@@ -464,7 +414,7 @@
           <a:p>
             <a:fld id="{1D6A9494-7432-4242-91E8-82B2FB80EE9E}" type="datetimeFigureOut">
               <a:rPr lang="en-US" smtClean="0"/>
-              <a:t>3/10/2026</a:t>
+              <a:t>3/24/2026</a:t>
             </a:fld>
             <a:endParaRPr lang="en-US" dirty="0"/>
           </a:p>
@@ -776,7 +726,7 @@
           <a:p>
             <a:fld id="{490F82D5-E79D-AA43-A25E-D6C391467F8C}" type="datetime1">
               <a:rPr lang="en-CA" smtClean="0"/>
-              <a:t>2026-03-10</a:t>
+              <a:t>2026-03-24</a:t>
             </a:fld>
             <a:endParaRPr lang="en-US" dirty="0"/>
           </a:p>
@@ -2323,1597 +2273,6 @@
 </file>
 
 <file path=ppt/slideLayouts/slideLayout2.xml><?xml version="1.0" encoding="utf-8"?>
-<p:sldLayout xmlns:a="http://schemas.openxmlformats.org/drawingml/2006/main" xmlns:r="http://schemas.openxmlformats.org/officeDocument/2006/relationships" xmlns:p="http://schemas.openxmlformats.org/presentationml/2006/main" userDrawn="1">
-  <p:cSld name="1_Agenda">
-    <p:spTree>
-      <p:nvGrpSpPr>
-        <p:cNvPr id="1" name=""/>
-        <p:cNvGrpSpPr/>
-        <p:nvPr/>
-      </p:nvGrpSpPr>
-      <p:grpSpPr>
-        <a:xfrm>
-          <a:off x="0" y="0"/>
-          <a:ext cx="0" cy="0"/>
-          <a:chOff x="0" y="0"/>
-          <a:chExt cx="0" cy="0"/>
-        </a:xfrm>
-      </p:grpSpPr>
-      <p:sp>
-        <p:nvSpPr>
-          <p:cNvPr id="4" name="Date Placeholder 3">
-            <a:extLst>
-              <a:ext uri="{FF2B5EF4-FFF2-40B4-BE49-F238E27FC236}">
-                <a16:creationId xmlns:a16="http://schemas.microsoft.com/office/drawing/2014/main" id="{03E951F8-4E0A-4761-EE19-A087CB2CD62A}"/>
-              </a:ext>
-            </a:extLst>
-          </p:cNvPr>
-          <p:cNvSpPr>
-            <a:spLocks noGrp="1" noRot="1" noMove="1" noResize="1" noEditPoints="1" noAdjustHandles="1" noChangeArrowheads="1" noChangeShapeType="1"/>
-          </p:cNvSpPr>
-          <p:nvPr>
-            <p:ph type="dt" sz="half" idx="10"/>
-          </p:nvPr>
-        </p:nvSpPr>
-        <p:spPr>
-          <a:xfrm flipH="1">
-            <a:off x="-84287" y="-3175"/>
-            <a:ext cx="0" cy="0"/>
-          </a:xfrm>
-        </p:spPr>
-        <p:txBody>
-          <a:bodyPr/>
-          <a:lstStyle/>
-          <a:p>
-            <a:fld id="{490F82D5-E79D-AA43-A25E-D6C391467F8C}" type="datetime1">
-              <a:rPr lang="en-CA" smtClean="0"/>
-              <a:t>2026-03-10</a:t>
-            </a:fld>
-            <a:endParaRPr lang="en-US" dirty="0"/>
-          </a:p>
-        </p:txBody>
-      </p:sp>
-      <p:sp>
-        <p:nvSpPr>
-          <p:cNvPr id="9" name="Rectangle 8">
-            <a:extLst>
-              <a:ext uri="{FF2B5EF4-FFF2-40B4-BE49-F238E27FC236}">
-                <a16:creationId xmlns:a16="http://schemas.microsoft.com/office/drawing/2014/main" id="{F8234A10-CF88-25DB-0542-C012E61E0696}"/>
-              </a:ext>
-            </a:extLst>
-          </p:cNvPr>
-          <p:cNvSpPr/>
-          <p:nvPr userDrawn="1"/>
-        </p:nvSpPr>
-        <p:spPr>
-          <a:xfrm>
-            <a:off x="0" y="6802244"/>
-            <a:ext cx="12192000" cy="55756"/>
-          </a:xfrm>
-          <a:prstGeom prst="rect">
-            <a:avLst/>
-          </a:prstGeom>
-          <a:gradFill>
-            <a:gsLst>
-              <a:gs pos="15000">
-                <a:schemeClr val="accent1"/>
-              </a:gs>
-              <a:gs pos="85000">
-                <a:schemeClr val="accent2"/>
-              </a:gs>
-            </a:gsLst>
-            <a:lin ang="0" scaled="0"/>
-          </a:gradFill>
-          <a:ln>
-            <a:noFill/>
-          </a:ln>
-        </p:spPr>
-        <p:style>
-          <a:lnRef idx="2">
-            <a:schemeClr val="accent1">
-              <a:shade val="50000"/>
-            </a:schemeClr>
-          </a:lnRef>
-          <a:fillRef idx="1">
-            <a:schemeClr val="accent1"/>
-          </a:fillRef>
-          <a:effectRef idx="0">
-            <a:schemeClr val="accent1"/>
-          </a:effectRef>
-          <a:fontRef idx="minor">
-            <a:schemeClr val="lt1"/>
-          </a:fontRef>
-        </p:style>
-        <p:txBody>
-          <a:bodyPr rot="0" spcFirstLastPara="0" vertOverflow="overflow" horzOverflow="overflow" vert="horz" wrap="square" lIns="91440" tIns="45720" rIns="91440" bIns="45720" numCol="1" spcCol="0" rtlCol="0" fromWordArt="0" anchor="t" anchorCtr="0" forceAA="0" compatLnSpc="1">
-            <a:prstTxWarp prst="textNoShape">
-              <a:avLst/>
-            </a:prstTxWarp>
-            <a:noAutofit/>
-          </a:bodyPr>
-          <a:lstStyle/>
-          <a:p>
-            <a:pPr algn="ctr">
-              <a:spcBef>
-                <a:spcPts val="900"/>
-              </a:spcBef>
-            </a:pPr>
-            <a:endParaRPr lang="en-US" sz="2000" b="0" i="0" dirty="0">
-              <a:latin typeface="Spectrum Sans" panose="020B0502020503020304" pitchFamily="34" charset="0"/>
-              <a:cs typeface="Spectrum Sans" panose="020B0502020503020304" pitchFamily="34" charset="0"/>
-            </a:endParaRPr>
-          </a:p>
-        </p:txBody>
-      </p:sp>
-      <p:grpSp>
-        <p:nvGrpSpPr>
-          <p:cNvPr id="2" name="Group 1">
-            <a:extLst>
-              <a:ext uri="{FF2B5EF4-FFF2-40B4-BE49-F238E27FC236}">
-                <a16:creationId xmlns:a16="http://schemas.microsoft.com/office/drawing/2014/main" id="{5F7813AD-4E35-9E50-4055-6A0334B4C525}"/>
-              </a:ext>
-            </a:extLst>
-          </p:cNvPr>
-          <p:cNvGrpSpPr/>
-          <p:nvPr userDrawn="1"/>
-        </p:nvGrpSpPr>
-        <p:grpSpPr>
-          <a:xfrm>
-            <a:off x="4203082" y="339498"/>
-            <a:ext cx="7682808" cy="1852235"/>
-            <a:chOff x="4203082" y="339498"/>
-            <a:chExt cx="7682808" cy="1852235"/>
-          </a:xfrm>
-        </p:grpSpPr>
-        <p:grpSp>
-          <p:nvGrpSpPr>
-            <p:cNvPr id="3" name="Group 2">
-              <a:extLst>
-                <a:ext uri="{FF2B5EF4-FFF2-40B4-BE49-F238E27FC236}">
-                  <a16:creationId xmlns:a16="http://schemas.microsoft.com/office/drawing/2014/main" id="{8BF07B51-942E-121D-BE6D-3C8956E84532}"/>
-                </a:ext>
-              </a:extLst>
-            </p:cNvPr>
-            <p:cNvGrpSpPr/>
-            <p:nvPr/>
-          </p:nvGrpSpPr>
-          <p:grpSpPr>
-            <a:xfrm>
-              <a:off x="4203082" y="339498"/>
-              <a:ext cx="3660706" cy="1852235"/>
-              <a:chOff x="4203082" y="339498"/>
-              <a:chExt cx="3660706" cy="1852235"/>
-            </a:xfrm>
-          </p:grpSpPr>
-          <p:sp>
-            <p:nvSpPr>
-              <p:cNvPr id="12" name="Text Placeholder 5">
-                <a:extLst>
-                  <a:ext uri="{FF2B5EF4-FFF2-40B4-BE49-F238E27FC236}">
-                    <a16:creationId xmlns:a16="http://schemas.microsoft.com/office/drawing/2014/main" id="{507E24C1-9062-9441-7D9E-EF3CE63FB299}"/>
-                  </a:ext>
-                </a:extLst>
-              </p:cNvPr>
-              <p:cNvSpPr txBox="1">
-                <a:spLocks/>
-              </p:cNvSpPr>
-              <p:nvPr/>
-            </p:nvSpPr>
-            <p:spPr>
-              <a:xfrm>
-                <a:off x="4206188" y="545813"/>
-                <a:ext cx="3657600" cy="1645920"/>
-              </a:xfrm>
-              <a:prstGeom prst="roundRect">
-                <a:avLst>
-                  <a:gd name="adj" fmla="val 5698"/>
-                </a:avLst>
-              </a:prstGeom>
-              <a:solidFill>
-                <a:schemeClr val="bg2"/>
-              </a:solidFill>
-              <a:ln w="19050" cap="flat" cmpd="sng" algn="ctr">
-                <a:gradFill flip="none" rotWithShape="1">
-                  <a:gsLst>
-                    <a:gs pos="0">
-                      <a:schemeClr val="accent1"/>
-                    </a:gs>
-                    <a:gs pos="100000">
-                      <a:schemeClr val="accent2"/>
-                    </a:gs>
-                  </a:gsLst>
-                  <a:lin ang="0" scaled="1"/>
-                  <a:tileRect/>
-                </a:gradFill>
-                <a:prstDash val="solid"/>
-                <a:miter lim="800000"/>
-              </a:ln>
-              <a:effectLst>
-                <a:outerShdw blurRad="288898" sx="102000" sy="102000" algn="ctr" rotWithShape="0">
-                  <a:schemeClr val="accent1">
-                    <a:alpha val="18227"/>
-                  </a:schemeClr>
-                </a:outerShdw>
-              </a:effectLst>
-            </p:spPr>
-            <p:txBody>
-              <a:bodyPr vert="horz" lIns="274320" tIns="228600" rIns="0" bIns="182880" rtlCol="0" anchor="t">
-                <a:noAutofit/>
-              </a:bodyPr>
-              <a:lstStyle>
-                <a:lvl1pPr marL="0" indent="0" algn="l" defTabSz="914400" rtl="0" eaLnBrk="1" latinLnBrk="0" hangingPunct="1">
-                  <a:lnSpc>
-                    <a:spcPct val="100000"/>
-                  </a:lnSpc>
-                  <a:spcBef>
-                    <a:spcPts val="1000"/>
-                  </a:spcBef>
-                  <a:buFont typeface="Arial" panose="020B0604020202020204" pitchFamily="34" charset="0"/>
-                  <a:buNone/>
-                  <a:defRPr lang="en-US" sz="100" b="0" i="0" kern="1200">
-                    <a:noFill/>
-                    <a:latin typeface="+mn-lt"/>
-                    <a:ea typeface="+mn-ea"/>
-                    <a:cs typeface="+mn-cs"/>
-                  </a:defRPr>
-                </a:lvl1pPr>
-                <a:lvl2pPr marL="225425" indent="-214313" algn="l" defTabSz="914400" rtl="0" eaLnBrk="1" latinLnBrk="0" hangingPunct="1">
-                  <a:lnSpc>
-                    <a:spcPct val="100000"/>
-                  </a:lnSpc>
-                  <a:spcBef>
-                    <a:spcPts val="500"/>
-                  </a:spcBef>
-                  <a:buFont typeface="Arial" panose="020B0604020202020204" pitchFamily="34" charset="0"/>
-                  <a:buChar char="•"/>
-                  <a:tabLst/>
-                  <a:defRPr sz="1600" b="0" i="0" kern="1200">
-                    <a:solidFill>
-                      <a:schemeClr val="lt1"/>
-                    </a:solidFill>
-                    <a:latin typeface="+mn-lt"/>
-                    <a:ea typeface="+mn-ea"/>
-                    <a:cs typeface="+mn-cs"/>
-                  </a:defRPr>
-                </a:lvl2pPr>
-                <a:lvl3pPr marL="403225" indent="-177800" algn="l" defTabSz="914400" rtl="0" eaLnBrk="1" latinLnBrk="0" hangingPunct="1">
-                  <a:lnSpc>
-                    <a:spcPct val="100000"/>
-                  </a:lnSpc>
-                  <a:spcBef>
-                    <a:spcPts val="500"/>
-                  </a:spcBef>
-                  <a:buFont typeface="Arial" panose="020B0604020202020204" pitchFamily="34" charset="0"/>
-                  <a:buChar char="•"/>
-                  <a:tabLst/>
-                  <a:defRPr sz="1400" b="0" i="0" kern="1200">
-                    <a:solidFill>
-                      <a:schemeClr val="lt1"/>
-                    </a:solidFill>
-                    <a:latin typeface="+mn-lt"/>
-                    <a:ea typeface="+mn-ea"/>
-                    <a:cs typeface="+mn-cs"/>
-                  </a:defRPr>
-                </a:lvl3pPr>
-                <a:lvl4pPr marL="581025" indent="-177800" algn="l" defTabSz="914400" rtl="0" eaLnBrk="1" latinLnBrk="0" hangingPunct="1">
-                  <a:lnSpc>
-                    <a:spcPct val="100000"/>
-                  </a:lnSpc>
-                  <a:spcBef>
-                    <a:spcPts val="500"/>
-                  </a:spcBef>
-                  <a:buFont typeface="Arial" panose="020B0604020202020204" pitchFamily="34" charset="0"/>
-                  <a:buChar char="•"/>
-                  <a:tabLst/>
-                  <a:defRPr sz="1200" b="0" i="0" kern="1200">
-                    <a:solidFill>
-                      <a:schemeClr val="lt1"/>
-                    </a:solidFill>
-                    <a:latin typeface="+mn-lt"/>
-                    <a:ea typeface="+mn-ea"/>
-                    <a:cs typeface="+mn-cs"/>
-                  </a:defRPr>
-                </a:lvl4pPr>
-                <a:lvl5pPr marL="758825" indent="-177800" algn="l" defTabSz="914400" rtl="0" eaLnBrk="1" latinLnBrk="0" hangingPunct="1">
-                  <a:lnSpc>
-                    <a:spcPct val="100000"/>
-                  </a:lnSpc>
-                  <a:spcBef>
-                    <a:spcPts val="500"/>
-                  </a:spcBef>
-                  <a:buFont typeface="Arial" panose="020B0604020202020204" pitchFamily="34" charset="0"/>
-                  <a:buChar char="•"/>
-                  <a:tabLst/>
-                  <a:defRPr sz="1200" b="0" i="0" kern="1200">
-                    <a:solidFill>
-                      <a:schemeClr val="lt1"/>
-                    </a:solidFill>
-                    <a:latin typeface="+mn-lt"/>
-                    <a:ea typeface="+mn-ea"/>
-                    <a:cs typeface="+mn-cs"/>
-                  </a:defRPr>
-                </a:lvl5pPr>
-                <a:lvl6pPr marL="758825" indent="-177800" algn="l" defTabSz="914400" rtl="0" eaLnBrk="1" latinLnBrk="0" hangingPunct="1">
-                  <a:lnSpc>
-                    <a:spcPct val="100000"/>
-                  </a:lnSpc>
-                  <a:spcBef>
-                    <a:spcPts val="500"/>
-                  </a:spcBef>
-                  <a:buFont typeface="Arial" panose="020B0604020202020204" pitchFamily="34" charset="0"/>
-                  <a:buChar char="•"/>
-                  <a:tabLst/>
-                  <a:defRPr sz="1400" kern="1200">
-                    <a:solidFill>
-                      <a:schemeClr val="lt1"/>
-                    </a:solidFill>
-                    <a:latin typeface="+mn-lt"/>
-                    <a:ea typeface="+mn-ea"/>
-                    <a:cs typeface="+mn-cs"/>
-                  </a:defRPr>
-                </a:lvl6pPr>
-                <a:lvl7pPr marL="758825" indent="-177800" algn="l" defTabSz="914400" rtl="0" eaLnBrk="1" latinLnBrk="0" hangingPunct="1">
-                  <a:lnSpc>
-                    <a:spcPct val="100000"/>
-                  </a:lnSpc>
-                  <a:spcBef>
-                    <a:spcPts val="500"/>
-                  </a:spcBef>
-                  <a:buFont typeface="Arial" panose="020B0604020202020204" pitchFamily="34" charset="0"/>
-                  <a:buChar char="•"/>
-                  <a:tabLst/>
-                  <a:defRPr sz="1400" kern="1200">
-                    <a:solidFill>
-                      <a:schemeClr val="lt1"/>
-                    </a:solidFill>
-                    <a:latin typeface="+mn-lt"/>
-                    <a:ea typeface="+mn-ea"/>
-                    <a:cs typeface="+mn-cs"/>
-                  </a:defRPr>
-                </a:lvl7pPr>
-                <a:lvl8pPr marL="758825" indent="-177800" algn="l" defTabSz="914400" rtl="0" eaLnBrk="1" latinLnBrk="0" hangingPunct="1">
-                  <a:lnSpc>
-                    <a:spcPct val="100000"/>
-                  </a:lnSpc>
-                  <a:spcBef>
-                    <a:spcPts val="500"/>
-                  </a:spcBef>
-                  <a:buFont typeface="Arial" panose="020B0604020202020204" pitchFamily="34" charset="0"/>
-                  <a:buChar char="•"/>
-                  <a:tabLst/>
-                  <a:defRPr sz="1400" kern="1200">
-                    <a:solidFill>
-                      <a:schemeClr val="lt1"/>
-                    </a:solidFill>
-                    <a:latin typeface="+mn-lt"/>
-                    <a:ea typeface="+mn-ea"/>
-                    <a:cs typeface="+mn-cs"/>
-                  </a:defRPr>
-                </a:lvl8pPr>
-                <a:lvl9pPr marL="581025" indent="0" algn="l" defTabSz="914400" rtl="0" eaLnBrk="1" latinLnBrk="0" hangingPunct="1">
-                  <a:lnSpc>
-                    <a:spcPct val="100000"/>
-                  </a:lnSpc>
-                  <a:spcBef>
-                    <a:spcPts val="500"/>
-                  </a:spcBef>
-                  <a:buFont typeface="Arial" panose="020B0604020202020204" pitchFamily="34" charset="0"/>
-                  <a:buNone/>
-                  <a:tabLst/>
-                  <a:defRPr sz="1400" kern="1200">
-                    <a:solidFill>
-                      <a:schemeClr val="lt1"/>
-                    </a:solidFill>
-                    <a:latin typeface="+mn-lt"/>
-                    <a:ea typeface="+mn-ea"/>
-                    <a:cs typeface="+mn-cs"/>
-                  </a:defRPr>
-                </a:lvl9pPr>
-              </a:lstStyle>
-              <a:p>
-                <a:pPr marL="0" marR="0" lvl="0" indent="0" algn="l" defTabSz="91440" rtl="0" eaLnBrk="1" fontAlgn="auto" latinLnBrk="0" hangingPunct="1">
-                  <a:lnSpc>
-                    <a:spcPct val="100000"/>
-                  </a:lnSpc>
-                  <a:spcBef>
-                    <a:spcPts val="300"/>
-                  </a:spcBef>
-                  <a:spcAft>
-                    <a:spcPts val="0"/>
-                  </a:spcAft>
-                  <a:buClrTx/>
-                  <a:buSzTx/>
-                  <a:buFont typeface="Arial" panose="020B0604020202020204" pitchFamily="34" charset="0"/>
-                  <a:buNone/>
-                  <a:tabLst/>
-                  <a:defRPr/>
-                </a:pPr>
-                <a:endParaRPr kumimoji="0" lang="en-US" sz="1200" b="0" i="0" u="none" strike="noStrike" kern="1200" cap="none" spc="0" normalizeH="0" baseline="0" noProof="0" dirty="0">
-                  <a:ln>
-                    <a:noFill/>
-                  </a:ln>
-                  <a:solidFill>
-                    <a:srgbClr val="FFFFFF"/>
-                  </a:solidFill>
-                  <a:effectLst/>
-                  <a:uLnTx/>
-                  <a:uFillTx/>
-                  <a:latin typeface="Spectrum Sans Book" panose="02110004020202020204"/>
-                  <a:ea typeface="+mn-ea"/>
-                  <a:cs typeface="+mn-cs"/>
-                </a:endParaRPr>
-              </a:p>
-            </p:txBody>
-          </p:sp>
-          <p:sp>
-            <p:nvSpPr>
-              <p:cNvPr id="13" name="Text Placeholder 5">
-                <a:extLst>
-                  <a:ext uri="{FF2B5EF4-FFF2-40B4-BE49-F238E27FC236}">
-                    <a16:creationId xmlns:a16="http://schemas.microsoft.com/office/drawing/2014/main" id="{22D6CD2E-C902-7D88-D37E-3A7E0CFD2FA0}"/>
-                  </a:ext>
-                </a:extLst>
-              </p:cNvPr>
-              <p:cNvSpPr txBox="1">
-                <a:spLocks/>
-              </p:cNvSpPr>
-              <p:nvPr/>
-            </p:nvSpPr>
-            <p:spPr>
-              <a:xfrm>
-                <a:off x="4203082" y="339498"/>
-                <a:ext cx="2468880" cy="413209"/>
-              </a:xfrm>
-              <a:prstGeom prst="roundRect">
-                <a:avLst>
-                  <a:gd name="adj" fmla="val 19110"/>
-                </a:avLst>
-              </a:prstGeom>
-              <a:solidFill>
-                <a:schemeClr val="bg2"/>
-              </a:solidFill>
-              <a:ln w="19050" cap="flat" cmpd="sng" algn="ctr">
-                <a:gradFill flip="none" rotWithShape="1">
-                  <a:gsLst>
-                    <a:gs pos="0">
-                      <a:schemeClr val="accent1"/>
-                    </a:gs>
-                    <a:gs pos="100000">
-                      <a:schemeClr val="accent2"/>
-                    </a:gs>
-                  </a:gsLst>
-                  <a:lin ang="0" scaled="1"/>
-                  <a:tileRect/>
-                </a:gradFill>
-                <a:prstDash val="solid"/>
-                <a:miter lim="800000"/>
-              </a:ln>
-              <a:effectLst>
-                <a:outerShdw blurRad="288898" sx="102000" sy="102000" algn="ctr" rotWithShape="0">
-                  <a:schemeClr val="accent1">
-                    <a:alpha val="18227"/>
-                  </a:schemeClr>
-                </a:outerShdw>
-              </a:effectLst>
-            </p:spPr>
-            <p:txBody>
-              <a:bodyPr vert="horz" lIns="274320" tIns="0" rIns="0" bIns="0" rtlCol="0" anchor="ctr">
-                <a:noAutofit/>
-              </a:bodyPr>
-              <a:lstStyle>
-                <a:defPPr>
-                  <a:defRPr lang="en-US"/>
-                </a:defPPr>
-                <a:lvl1pPr indent="0">
-                  <a:lnSpc>
-                    <a:spcPct val="100000"/>
-                  </a:lnSpc>
-                  <a:spcBef>
-                    <a:spcPts val="1000"/>
-                  </a:spcBef>
-                  <a:buFont typeface="Arial" panose="020B0604020202020204" pitchFamily="34" charset="0"/>
-                  <a:buNone/>
-                  <a:defRPr sz="1400" b="0" i="0"/>
-                </a:lvl1pPr>
-                <a:lvl2pPr marL="225425" indent="-214313">
-                  <a:lnSpc>
-                    <a:spcPct val="100000"/>
-                  </a:lnSpc>
-                  <a:spcBef>
-                    <a:spcPts val="500"/>
-                  </a:spcBef>
-                  <a:buFont typeface="Arial" panose="020B0604020202020204" pitchFamily="34" charset="0"/>
-                  <a:buChar char="•"/>
-                  <a:tabLst/>
-                  <a:defRPr sz="1600" b="0" i="0">
-                    <a:solidFill>
-                      <a:schemeClr val="lt1"/>
-                    </a:solidFill>
-                  </a:defRPr>
-                </a:lvl2pPr>
-                <a:lvl3pPr marL="403225" indent="-177800">
-                  <a:lnSpc>
-                    <a:spcPct val="100000"/>
-                  </a:lnSpc>
-                  <a:spcBef>
-                    <a:spcPts val="500"/>
-                  </a:spcBef>
-                  <a:buFont typeface="Arial" panose="020B0604020202020204" pitchFamily="34" charset="0"/>
-                  <a:buChar char="•"/>
-                  <a:tabLst/>
-                  <a:defRPr sz="1400" b="0" i="0">
-                    <a:solidFill>
-                      <a:schemeClr val="lt1"/>
-                    </a:solidFill>
-                  </a:defRPr>
-                </a:lvl3pPr>
-                <a:lvl4pPr marL="581025" indent="-177800">
-                  <a:lnSpc>
-                    <a:spcPct val="100000"/>
-                  </a:lnSpc>
-                  <a:spcBef>
-                    <a:spcPts val="500"/>
-                  </a:spcBef>
-                  <a:buFont typeface="Arial" panose="020B0604020202020204" pitchFamily="34" charset="0"/>
-                  <a:buChar char="•"/>
-                  <a:tabLst/>
-                  <a:defRPr sz="1200" b="0" i="0">
-                    <a:solidFill>
-                      <a:schemeClr val="lt1"/>
-                    </a:solidFill>
-                  </a:defRPr>
-                </a:lvl4pPr>
-                <a:lvl5pPr marL="758825" indent="-177800">
-                  <a:lnSpc>
-                    <a:spcPct val="100000"/>
-                  </a:lnSpc>
-                  <a:spcBef>
-                    <a:spcPts val="500"/>
-                  </a:spcBef>
-                  <a:buFont typeface="Arial" panose="020B0604020202020204" pitchFamily="34" charset="0"/>
-                  <a:buChar char="•"/>
-                  <a:tabLst/>
-                  <a:defRPr sz="1200" b="0" i="0">
-                    <a:solidFill>
-                      <a:schemeClr val="lt1"/>
-                    </a:solidFill>
-                  </a:defRPr>
-                </a:lvl5pPr>
-                <a:lvl6pPr marL="758825" indent="-177800">
-                  <a:lnSpc>
-                    <a:spcPct val="100000"/>
-                  </a:lnSpc>
-                  <a:spcBef>
-                    <a:spcPts val="500"/>
-                  </a:spcBef>
-                  <a:buFont typeface="Arial" panose="020B0604020202020204" pitchFamily="34" charset="0"/>
-                  <a:buChar char="•"/>
-                  <a:tabLst/>
-                  <a:defRPr sz="1400">
-                    <a:solidFill>
-                      <a:schemeClr val="lt1"/>
-                    </a:solidFill>
-                  </a:defRPr>
-                </a:lvl6pPr>
-                <a:lvl7pPr marL="758825" indent="-177800">
-                  <a:lnSpc>
-                    <a:spcPct val="100000"/>
-                  </a:lnSpc>
-                  <a:spcBef>
-                    <a:spcPts val="500"/>
-                  </a:spcBef>
-                  <a:buFont typeface="Arial" panose="020B0604020202020204" pitchFamily="34" charset="0"/>
-                  <a:buChar char="•"/>
-                  <a:tabLst/>
-                  <a:defRPr sz="1400">
-                    <a:solidFill>
-                      <a:schemeClr val="lt1"/>
-                    </a:solidFill>
-                  </a:defRPr>
-                </a:lvl7pPr>
-                <a:lvl8pPr marL="758825" indent="-177800">
-                  <a:lnSpc>
-                    <a:spcPct val="100000"/>
-                  </a:lnSpc>
-                  <a:spcBef>
-                    <a:spcPts val="500"/>
-                  </a:spcBef>
-                  <a:buFont typeface="Arial" panose="020B0604020202020204" pitchFamily="34" charset="0"/>
-                  <a:buChar char="•"/>
-                  <a:tabLst/>
-                  <a:defRPr sz="1400">
-                    <a:solidFill>
-                      <a:schemeClr val="lt1"/>
-                    </a:solidFill>
-                  </a:defRPr>
-                </a:lvl8pPr>
-                <a:lvl9pPr marL="581025" indent="0">
-                  <a:lnSpc>
-                    <a:spcPct val="100000"/>
-                  </a:lnSpc>
-                  <a:spcBef>
-                    <a:spcPts val="500"/>
-                  </a:spcBef>
-                  <a:buFont typeface="Arial" panose="020B0604020202020204" pitchFamily="34" charset="0"/>
-                  <a:buNone/>
-                  <a:tabLst/>
-                  <a:defRPr sz="1400">
-                    <a:solidFill>
-                      <a:schemeClr val="lt1"/>
-                    </a:solidFill>
-                  </a:defRPr>
-                </a:lvl9pPr>
-              </a:lstStyle>
-              <a:p>
-                <a:pPr marL="0" marR="0" lvl="0" indent="0" algn="l" defTabSz="914400" rtl="0" eaLnBrk="1" fontAlgn="auto" latinLnBrk="0" hangingPunct="1">
-                  <a:lnSpc>
-                    <a:spcPct val="100000"/>
-                  </a:lnSpc>
-                  <a:spcBef>
-                    <a:spcPts val="1000"/>
-                  </a:spcBef>
-                  <a:spcAft>
-                    <a:spcPts val="0"/>
-                  </a:spcAft>
-                  <a:buClrTx/>
-                  <a:buSzTx/>
-                  <a:buFont typeface="Arial" panose="020B0604020202020204" pitchFamily="34" charset="0"/>
-                  <a:buNone/>
-                  <a:tabLst/>
-                  <a:defRPr/>
-                </a:pPr>
-                <a:r>
-                  <a:rPr kumimoji="0" lang="en-US" sz="1400" b="1" i="0" u="none" strike="noStrike" kern="1200" cap="none" spc="0" normalizeH="0" baseline="0" noProof="0" dirty="0">
-                    <a:ln>
-                      <a:noFill/>
-                    </a:ln>
-                    <a:solidFill>
-                      <a:schemeClr val="tx1"/>
-                    </a:solidFill>
-                    <a:effectLst/>
-                    <a:uLnTx/>
-                    <a:uFillTx/>
-                    <a:latin typeface="Spectrum Sans Bold" panose="02110004020202020204"/>
-                    <a:ea typeface="+mn-ea"/>
-                    <a:cs typeface="+mn-cs"/>
-                  </a:rPr>
-                  <a:t>Key Dates</a:t>
-                </a:r>
-              </a:p>
-            </p:txBody>
-          </p:sp>
-        </p:grpSp>
-        <p:grpSp>
-          <p:nvGrpSpPr>
-            <p:cNvPr id="6" name="Group 5">
-              <a:extLst>
-                <a:ext uri="{FF2B5EF4-FFF2-40B4-BE49-F238E27FC236}">
-                  <a16:creationId xmlns:a16="http://schemas.microsoft.com/office/drawing/2014/main" id="{DC921DF1-8B84-1B0C-B80D-3103D04B8E5B}"/>
-                </a:ext>
-              </a:extLst>
-            </p:cNvPr>
-            <p:cNvGrpSpPr/>
-            <p:nvPr/>
-          </p:nvGrpSpPr>
-          <p:grpSpPr>
-            <a:xfrm>
-              <a:off x="8228290" y="339498"/>
-              <a:ext cx="3657600" cy="1852235"/>
-              <a:chOff x="8246762" y="339498"/>
-              <a:chExt cx="3657600" cy="1852235"/>
-            </a:xfrm>
-          </p:grpSpPr>
-          <p:sp>
-            <p:nvSpPr>
-              <p:cNvPr id="7" name="Text Placeholder 5">
-                <a:extLst>
-                  <a:ext uri="{FF2B5EF4-FFF2-40B4-BE49-F238E27FC236}">
-                    <a16:creationId xmlns:a16="http://schemas.microsoft.com/office/drawing/2014/main" id="{15883762-076C-1E30-A144-F7CB60D15B45}"/>
-                  </a:ext>
-                </a:extLst>
-              </p:cNvPr>
-              <p:cNvSpPr txBox="1">
-                <a:spLocks/>
-              </p:cNvSpPr>
-              <p:nvPr/>
-            </p:nvSpPr>
-            <p:spPr>
-              <a:xfrm>
-                <a:off x="8246762" y="545813"/>
-                <a:ext cx="3657600" cy="1645920"/>
-              </a:xfrm>
-              <a:prstGeom prst="roundRect">
-                <a:avLst>
-                  <a:gd name="adj" fmla="val 5698"/>
-                </a:avLst>
-              </a:prstGeom>
-              <a:solidFill>
-                <a:schemeClr val="bg2"/>
-              </a:solidFill>
-              <a:ln w="19050" cap="flat" cmpd="sng" algn="ctr">
-                <a:gradFill flip="none" rotWithShape="1">
-                  <a:gsLst>
-                    <a:gs pos="0">
-                      <a:schemeClr val="accent1"/>
-                    </a:gs>
-                    <a:gs pos="100000">
-                      <a:schemeClr val="accent2"/>
-                    </a:gs>
-                  </a:gsLst>
-                  <a:lin ang="0" scaled="1"/>
-                  <a:tileRect/>
-                </a:gradFill>
-                <a:prstDash val="solid"/>
-                <a:miter lim="800000"/>
-              </a:ln>
-              <a:effectLst>
-                <a:outerShdw blurRad="288898" sx="102000" sy="102000" algn="ctr" rotWithShape="0">
-                  <a:schemeClr val="accent1">
-                    <a:alpha val="18227"/>
-                  </a:schemeClr>
-                </a:outerShdw>
-              </a:effectLst>
-            </p:spPr>
-            <p:txBody>
-              <a:bodyPr vert="horz" lIns="274320" tIns="182880" rIns="0" bIns="182880" rtlCol="0" anchor="t">
-                <a:noAutofit/>
-              </a:bodyPr>
-              <a:lstStyle>
-                <a:defPPr>
-                  <a:defRPr lang="en-US"/>
-                </a:defPPr>
-                <a:lvl1pPr indent="0">
-                  <a:lnSpc>
-                    <a:spcPct val="100000"/>
-                  </a:lnSpc>
-                  <a:spcBef>
-                    <a:spcPts val="1000"/>
-                  </a:spcBef>
-                  <a:buFont typeface="Arial" panose="020B0604020202020204" pitchFamily="34" charset="0"/>
-                  <a:buNone/>
-                  <a:defRPr sz="1400" b="0" i="0"/>
-                </a:lvl1pPr>
-                <a:lvl2pPr marL="225425" indent="-214313">
-                  <a:lnSpc>
-                    <a:spcPct val="100000"/>
-                  </a:lnSpc>
-                  <a:spcBef>
-                    <a:spcPts val="500"/>
-                  </a:spcBef>
-                  <a:buFont typeface="Arial" panose="020B0604020202020204" pitchFamily="34" charset="0"/>
-                  <a:buChar char="•"/>
-                  <a:tabLst/>
-                  <a:defRPr sz="1600" b="0" i="0">
-                    <a:solidFill>
-                      <a:schemeClr val="lt1"/>
-                    </a:solidFill>
-                  </a:defRPr>
-                </a:lvl2pPr>
-                <a:lvl3pPr marL="403225" indent="-177800">
-                  <a:lnSpc>
-                    <a:spcPct val="100000"/>
-                  </a:lnSpc>
-                  <a:spcBef>
-                    <a:spcPts val="500"/>
-                  </a:spcBef>
-                  <a:buFont typeface="Arial" panose="020B0604020202020204" pitchFamily="34" charset="0"/>
-                  <a:buChar char="•"/>
-                  <a:tabLst/>
-                  <a:defRPr sz="1400" b="0" i="0">
-                    <a:solidFill>
-                      <a:schemeClr val="lt1"/>
-                    </a:solidFill>
-                  </a:defRPr>
-                </a:lvl3pPr>
-                <a:lvl4pPr marL="581025" indent="-177800">
-                  <a:lnSpc>
-                    <a:spcPct val="100000"/>
-                  </a:lnSpc>
-                  <a:spcBef>
-                    <a:spcPts val="500"/>
-                  </a:spcBef>
-                  <a:buFont typeface="Arial" panose="020B0604020202020204" pitchFamily="34" charset="0"/>
-                  <a:buChar char="•"/>
-                  <a:tabLst/>
-                  <a:defRPr sz="1200" b="0" i="0">
-                    <a:solidFill>
-                      <a:schemeClr val="lt1"/>
-                    </a:solidFill>
-                  </a:defRPr>
-                </a:lvl4pPr>
-                <a:lvl5pPr marL="758825" indent="-177800">
-                  <a:lnSpc>
-                    <a:spcPct val="100000"/>
-                  </a:lnSpc>
-                  <a:spcBef>
-                    <a:spcPts val="500"/>
-                  </a:spcBef>
-                  <a:buFont typeface="Arial" panose="020B0604020202020204" pitchFamily="34" charset="0"/>
-                  <a:buChar char="•"/>
-                  <a:tabLst/>
-                  <a:defRPr sz="1200" b="0" i="0">
-                    <a:solidFill>
-                      <a:schemeClr val="lt1"/>
-                    </a:solidFill>
-                  </a:defRPr>
-                </a:lvl5pPr>
-                <a:lvl6pPr marL="758825" indent="-177800">
-                  <a:lnSpc>
-                    <a:spcPct val="100000"/>
-                  </a:lnSpc>
-                  <a:spcBef>
-                    <a:spcPts val="500"/>
-                  </a:spcBef>
-                  <a:buFont typeface="Arial" panose="020B0604020202020204" pitchFamily="34" charset="0"/>
-                  <a:buChar char="•"/>
-                  <a:tabLst/>
-                  <a:defRPr sz="1400">
-                    <a:solidFill>
-                      <a:schemeClr val="lt1"/>
-                    </a:solidFill>
-                  </a:defRPr>
-                </a:lvl6pPr>
-                <a:lvl7pPr marL="758825" indent="-177800">
-                  <a:lnSpc>
-                    <a:spcPct val="100000"/>
-                  </a:lnSpc>
-                  <a:spcBef>
-                    <a:spcPts val="500"/>
-                  </a:spcBef>
-                  <a:buFont typeface="Arial" panose="020B0604020202020204" pitchFamily="34" charset="0"/>
-                  <a:buChar char="•"/>
-                  <a:tabLst/>
-                  <a:defRPr sz="1400">
-                    <a:solidFill>
-                      <a:schemeClr val="lt1"/>
-                    </a:solidFill>
-                  </a:defRPr>
-                </a:lvl7pPr>
-                <a:lvl8pPr marL="758825" indent="-177800">
-                  <a:lnSpc>
-                    <a:spcPct val="100000"/>
-                  </a:lnSpc>
-                  <a:spcBef>
-                    <a:spcPts val="500"/>
-                  </a:spcBef>
-                  <a:buFont typeface="Arial" panose="020B0604020202020204" pitchFamily="34" charset="0"/>
-                  <a:buChar char="•"/>
-                  <a:tabLst/>
-                  <a:defRPr sz="1400">
-                    <a:solidFill>
-                      <a:schemeClr val="lt1"/>
-                    </a:solidFill>
-                  </a:defRPr>
-                </a:lvl8pPr>
-                <a:lvl9pPr marL="581025" indent="0">
-                  <a:lnSpc>
-                    <a:spcPct val="100000"/>
-                  </a:lnSpc>
-                  <a:spcBef>
-                    <a:spcPts val="500"/>
-                  </a:spcBef>
-                  <a:buFont typeface="Arial" panose="020B0604020202020204" pitchFamily="34" charset="0"/>
-                  <a:buNone/>
-                  <a:tabLst/>
-                  <a:defRPr sz="1400">
-                    <a:solidFill>
-                      <a:schemeClr val="lt1"/>
-                    </a:solidFill>
-                  </a:defRPr>
-                </a:lvl9pPr>
-              </a:lstStyle>
-              <a:p>
-                <a:pPr marL="0" marR="0" lvl="0" indent="0" algn="l" defTabSz="914400" rtl="0" eaLnBrk="1" fontAlgn="auto" latinLnBrk="0" hangingPunct="1">
-                  <a:lnSpc>
-                    <a:spcPct val="100000"/>
-                  </a:lnSpc>
-                  <a:spcBef>
-                    <a:spcPts val="1000"/>
-                  </a:spcBef>
-                  <a:spcAft>
-                    <a:spcPts val="0"/>
-                  </a:spcAft>
-                  <a:buClrTx/>
-                  <a:buSzTx/>
-                  <a:buFont typeface="Arial" panose="020B0604020202020204" pitchFamily="34" charset="0"/>
-                  <a:buNone/>
-                  <a:tabLst/>
-                  <a:defRPr/>
-                </a:pPr>
-                <a:r>
-                  <a:rPr kumimoji="0" lang="en-US" sz="1400" b="0" i="0" u="none" strike="noStrike" kern="1200" cap="none" spc="0" normalizeH="0" baseline="0" noProof="0" dirty="0">
-                    <a:ln>
-                      <a:noFill/>
-                    </a:ln>
-                    <a:solidFill>
-                      <a:srgbClr val="FFFFFF"/>
-                    </a:solidFill>
-                    <a:effectLst/>
-                    <a:uLnTx/>
-                    <a:uFillTx/>
-                    <a:latin typeface="Spectrum Sans Book" panose="02110004020202020204"/>
-                    <a:ea typeface="+mn-ea"/>
-                    <a:cs typeface="+mn-cs"/>
-                  </a:rPr>
-                  <a:t> </a:t>
-                </a:r>
-              </a:p>
-            </p:txBody>
-          </p:sp>
-          <p:sp>
-            <p:nvSpPr>
-              <p:cNvPr id="8" name="Text Placeholder 5">
-                <a:extLst>
-                  <a:ext uri="{FF2B5EF4-FFF2-40B4-BE49-F238E27FC236}">
-                    <a16:creationId xmlns:a16="http://schemas.microsoft.com/office/drawing/2014/main" id="{71088375-E3AE-9335-F358-A5011F8F0FBE}"/>
-                  </a:ext>
-                </a:extLst>
-              </p:cNvPr>
-              <p:cNvSpPr txBox="1">
-                <a:spLocks/>
-              </p:cNvSpPr>
-              <p:nvPr/>
-            </p:nvSpPr>
-            <p:spPr>
-              <a:xfrm>
-                <a:off x="8246762" y="339498"/>
-                <a:ext cx="2468880" cy="413209"/>
-              </a:xfrm>
-              <a:prstGeom prst="roundRect">
-                <a:avLst>
-                  <a:gd name="adj" fmla="val 19110"/>
-                </a:avLst>
-              </a:prstGeom>
-              <a:solidFill>
-                <a:schemeClr val="bg2"/>
-              </a:solidFill>
-              <a:ln w="19050" cap="flat" cmpd="sng" algn="ctr">
-                <a:gradFill flip="none" rotWithShape="1">
-                  <a:gsLst>
-                    <a:gs pos="0">
-                      <a:schemeClr val="accent1"/>
-                    </a:gs>
-                    <a:gs pos="100000">
-                      <a:schemeClr val="accent2"/>
-                    </a:gs>
-                  </a:gsLst>
-                  <a:lin ang="0" scaled="1"/>
-                  <a:tileRect/>
-                </a:gradFill>
-                <a:prstDash val="solid"/>
-                <a:miter lim="800000"/>
-              </a:ln>
-              <a:effectLst>
-                <a:outerShdw blurRad="288898" sx="102000" sy="102000" algn="ctr" rotWithShape="0">
-                  <a:schemeClr val="accent1">
-                    <a:alpha val="18227"/>
-                  </a:schemeClr>
-                </a:outerShdw>
-              </a:effectLst>
-            </p:spPr>
-            <p:txBody>
-              <a:bodyPr vert="horz" lIns="274320" tIns="0" rIns="0" bIns="0" rtlCol="0" anchor="ctr">
-                <a:noAutofit/>
-              </a:bodyPr>
-              <a:lstStyle>
-                <a:defPPr>
-                  <a:defRPr lang="en-US"/>
-                </a:defPPr>
-                <a:lvl1pPr indent="0">
-                  <a:lnSpc>
-                    <a:spcPct val="100000"/>
-                  </a:lnSpc>
-                  <a:spcBef>
-                    <a:spcPts val="1000"/>
-                  </a:spcBef>
-                  <a:buFont typeface="Arial" panose="020B0604020202020204" pitchFamily="34" charset="0"/>
-                  <a:buNone/>
-                  <a:defRPr sz="1400" b="0" i="0"/>
-                </a:lvl1pPr>
-                <a:lvl2pPr marL="225425" indent="-214313">
-                  <a:lnSpc>
-                    <a:spcPct val="100000"/>
-                  </a:lnSpc>
-                  <a:spcBef>
-                    <a:spcPts val="500"/>
-                  </a:spcBef>
-                  <a:buFont typeface="Arial" panose="020B0604020202020204" pitchFamily="34" charset="0"/>
-                  <a:buChar char="•"/>
-                  <a:tabLst/>
-                  <a:defRPr sz="1600" b="0" i="0">
-                    <a:solidFill>
-                      <a:schemeClr val="lt1"/>
-                    </a:solidFill>
-                  </a:defRPr>
-                </a:lvl2pPr>
-                <a:lvl3pPr marL="403225" indent="-177800">
-                  <a:lnSpc>
-                    <a:spcPct val="100000"/>
-                  </a:lnSpc>
-                  <a:spcBef>
-                    <a:spcPts val="500"/>
-                  </a:spcBef>
-                  <a:buFont typeface="Arial" panose="020B0604020202020204" pitchFamily="34" charset="0"/>
-                  <a:buChar char="•"/>
-                  <a:tabLst/>
-                  <a:defRPr sz="1400" b="0" i="0">
-                    <a:solidFill>
-                      <a:schemeClr val="lt1"/>
-                    </a:solidFill>
-                  </a:defRPr>
-                </a:lvl3pPr>
-                <a:lvl4pPr marL="581025" indent="-177800">
-                  <a:lnSpc>
-                    <a:spcPct val="100000"/>
-                  </a:lnSpc>
-                  <a:spcBef>
-                    <a:spcPts val="500"/>
-                  </a:spcBef>
-                  <a:buFont typeface="Arial" panose="020B0604020202020204" pitchFamily="34" charset="0"/>
-                  <a:buChar char="•"/>
-                  <a:tabLst/>
-                  <a:defRPr sz="1200" b="0" i="0">
-                    <a:solidFill>
-                      <a:schemeClr val="lt1"/>
-                    </a:solidFill>
-                  </a:defRPr>
-                </a:lvl4pPr>
-                <a:lvl5pPr marL="758825" indent="-177800">
-                  <a:lnSpc>
-                    <a:spcPct val="100000"/>
-                  </a:lnSpc>
-                  <a:spcBef>
-                    <a:spcPts val="500"/>
-                  </a:spcBef>
-                  <a:buFont typeface="Arial" panose="020B0604020202020204" pitchFamily="34" charset="0"/>
-                  <a:buChar char="•"/>
-                  <a:tabLst/>
-                  <a:defRPr sz="1200" b="0" i="0">
-                    <a:solidFill>
-                      <a:schemeClr val="lt1"/>
-                    </a:solidFill>
-                  </a:defRPr>
-                </a:lvl5pPr>
-                <a:lvl6pPr marL="758825" indent="-177800">
-                  <a:lnSpc>
-                    <a:spcPct val="100000"/>
-                  </a:lnSpc>
-                  <a:spcBef>
-                    <a:spcPts val="500"/>
-                  </a:spcBef>
-                  <a:buFont typeface="Arial" panose="020B0604020202020204" pitchFamily="34" charset="0"/>
-                  <a:buChar char="•"/>
-                  <a:tabLst/>
-                  <a:defRPr sz="1400">
-                    <a:solidFill>
-                      <a:schemeClr val="lt1"/>
-                    </a:solidFill>
-                  </a:defRPr>
-                </a:lvl6pPr>
-                <a:lvl7pPr marL="758825" indent="-177800">
-                  <a:lnSpc>
-                    <a:spcPct val="100000"/>
-                  </a:lnSpc>
-                  <a:spcBef>
-                    <a:spcPts val="500"/>
-                  </a:spcBef>
-                  <a:buFont typeface="Arial" panose="020B0604020202020204" pitchFamily="34" charset="0"/>
-                  <a:buChar char="•"/>
-                  <a:tabLst/>
-                  <a:defRPr sz="1400">
-                    <a:solidFill>
-                      <a:schemeClr val="lt1"/>
-                    </a:solidFill>
-                  </a:defRPr>
-                </a:lvl7pPr>
-                <a:lvl8pPr marL="758825" indent="-177800">
-                  <a:lnSpc>
-                    <a:spcPct val="100000"/>
-                  </a:lnSpc>
-                  <a:spcBef>
-                    <a:spcPts val="500"/>
-                  </a:spcBef>
-                  <a:buFont typeface="Arial" panose="020B0604020202020204" pitchFamily="34" charset="0"/>
-                  <a:buChar char="•"/>
-                  <a:tabLst/>
-                  <a:defRPr sz="1400">
-                    <a:solidFill>
-                      <a:schemeClr val="lt1"/>
-                    </a:solidFill>
-                  </a:defRPr>
-                </a:lvl8pPr>
-                <a:lvl9pPr marL="581025" indent="0">
-                  <a:lnSpc>
-                    <a:spcPct val="100000"/>
-                  </a:lnSpc>
-                  <a:spcBef>
-                    <a:spcPts val="500"/>
-                  </a:spcBef>
-                  <a:buFont typeface="Arial" panose="020B0604020202020204" pitchFamily="34" charset="0"/>
-                  <a:buNone/>
-                  <a:tabLst/>
-                  <a:defRPr sz="1400">
-                    <a:solidFill>
-                      <a:schemeClr val="lt1"/>
-                    </a:solidFill>
-                  </a:defRPr>
-                </a:lvl9pPr>
-              </a:lstStyle>
-              <a:p>
-                <a:pPr marL="0" marR="0" lvl="0" indent="0" algn="l" defTabSz="914400" rtl="0" eaLnBrk="1" fontAlgn="auto" latinLnBrk="0" hangingPunct="1">
-                  <a:lnSpc>
-                    <a:spcPct val="100000"/>
-                  </a:lnSpc>
-                  <a:spcBef>
-                    <a:spcPts val="1000"/>
-                  </a:spcBef>
-                  <a:spcAft>
-                    <a:spcPts val="0"/>
-                  </a:spcAft>
-                  <a:buClrTx/>
-                  <a:buSzTx/>
-                  <a:buFont typeface="Arial" panose="020B0604020202020204" pitchFamily="34" charset="0"/>
-                  <a:buNone/>
-                  <a:tabLst/>
-                  <a:defRPr/>
-                </a:pPr>
-                <a:r>
-                  <a:rPr kumimoji="0" lang="en-US" sz="1400" b="1" i="0" u="none" strike="noStrike" kern="1200" cap="none" spc="0" normalizeH="0" baseline="0" noProof="0" dirty="0">
-                    <a:ln>
-                      <a:noFill/>
-                    </a:ln>
-                    <a:solidFill>
-                      <a:schemeClr val="tx1"/>
-                    </a:solidFill>
-                    <a:effectLst/>
-                    <a:uLnTx/>
-                    <a:uFillTx/>
-                    <a:latin typeface="Spectrum Sans Bold" panose="02110004020202020204"/>
-                    <a:ea typeface="+mn-ea"/>
-                    <a:cs typeface="+mn-cs"/>
-                  </a:rPr>
-                  <a:t>Networks</a:t>
-                </a:r>
-              </a:p>
-            </p:txBody>
-          </p:sp>
-        </p:grpSp>
-      </p:grpSp>
-      <p:sp>
-        <p:nvSpPr>
-          <p:cNvPr id="17" name="Text Placeholder 5">
-            <a:extLst>
-              <a:ext uri="{FF2B5EF4-FFF2-40B4-BE49-F238E27FC236}">
-                <a16:creationId xmlns:a16="http://schemas.microsoft.com/office/drawing/2014/main" id="{BD525717-4734-AD68-629D-4801BA3F56D5}"/>
-              </a:ext>
-            </a:extLst>
-          </p:cNvPr>
-          <p:cNvSpPr txBox="1">
-            <a:spLocks/>
-          </p:cNvSpPr>
-          <p:nvPr userDrawn="1"/>
-        </p:nvSpPr>
-        <p:spPr>
-          <a:xfrm>
-            <a:off x="4204930" y="2727540"/>
-            <a:ext cx="7680960" cy="3458327"/>
-          </a:xfrm>
-          <a:prstGeom prst="roundRect">
-            <a:avLst>
-              <a:gd name="adj" fmla="val 5698"/>
-            </a:avLst>
-          </a:prstGeom>
-          <a:solidFill>
-            <a:schemeClr val="bg2"/>
-          </a:solidFill>
-          <a:ln w="19050" cap="flat" cmpd="sng" algn="ctr">
-            <a:gradFill flip="none" rotWithShape="1">
-              <a:gsLst>
-                <a:gs pos="0">
-                  <a:schemeClr val="accent1"/>
-                </a:gs>
-                <a:gs pos="100000">
-                  <a:schemeClr val="accent2"/>
-                </a:gs>
-              </a:gsLst>
-              <a:lin ang="0" scaled="1"/>
-              <a:tileRect/>
-            </a:gradFill>
-            <a:prstDash val="solid"/>
-            <a:miter lim="800000"/>
-          </a:ln>
-          <a:effectLst>
-            <a:outerShdw blurRad="288898" sx="102000" sy="102000" algn="ctr" rotWithShape="0">
-              <a:schemeClr val="accent1">
-                <a:alpha val="18227"/>
-              </a:schemeClr>
-            </a:outerShdw>
-          </a:effectLst>
-        </p:spPr>
-        <p:txBody>
-          <a:bodyPr vert="horz" lIns="274320" tIns="365760" rIns="0" bIns="182880" rtlCol="0" anchor="t">
-            <a:noAutofit/>
-          </a:bodyPr>
-          <a:lstStyle>
-            <a:defPPr>
-              <a:defRPr lang="en-US"/>
-            </a:defPPr>
-            <a:lvl1pPr indent="0">
-              <a:lnSpc>
-                <a:spcPct val="100000"/>
-              </a:lnSpc>
-              <a:spcBef>
-                <a:spcPts val="1000"/>
-              </a:spcBef>
-              <a:buFont typeface="Arial" panose="020B0604020202020204" pitchFamily="34" charset="0"/>
-              <a:buNone/>
-              <a:defRPr sz="1400" b="0" i="0"/>
-            </a:lvl1pPr>
-            <a:lvl2pPr marL="225425" indent="-214313">
-              <a:lnSpc>
-                <a:spcPct val="100000"/>
-              </a:lnSpc>
-              <a:spcBef>
-                <a:spcPts val="500"/>
-              </a:spcBef>
-              <a:buFont typeface="Arial" panose="020B0604020202020204" pitchFamily="34" charset="0"/>
-              <a:buChar char="•"/>
-              <a:tabLst/>
-              <a:defRPr sz="1600" b="0" i="0">
-                <a:solidFill>
-                  <a:schemeClr val="lt1"/>
-                </a:solidFill>
-              </a:defRPr>
-            </a:lvl2pPr>
-            <a:lvl3pPr marL="403225" indent="-177800">
-              <a:lnSpc>
-                <a:spcPct val="100000"/>
-              </a:lnSpc>
-              <a:spcBef>
-                <a:spcPts val="500"/>
-              </a:spcBef>
-              <a:buFont typeface="Arial" panose="020B0604020202020204" pitchFamily="34" charset="0"/>
-              <a:buChar char="•"/>
-              <a:tabLst/>
-              <a:defRPr sz="1400" b="0" i="0">
-                <a:solidFill>
-                  <a:schemeClr val="lt1"/>
-                </a:solidFill>
-              </a:defRPr>
-            </a:lvl3pPr>
-            <a:lvl4pPr marL="581025" indent="-177800">
-              <a:lnSpc>
-                <a:spcPct val="100000"/>
-              </a:lnSpc>
-              <a:spcBef>
-                <a:spcPts val="500"/>
-              </a:spcBef>
-              <a:buFont typeface="Arial" panose="020B0604020202020204" pitchFamily="34" charset="0"/>
-              <a:buChar char="•"/>
-              <a:tabLst/>
-              <a:defRPr sz="1200" b="0" i="0">
-                <a:solidFill>
-                  <a:schemeClr val="lt1"/>
-                </a:solidFill>
-              </a:defRPr>
-            </a:lvl4pPr>
-            <a:lvl5pPr marL="758825" indent="-177800">
-              <a:lnSpc>
-                <a:spcPct val="100000"/>
-              </a:lnSpc>
-              <a:spcBef>
-                <a:spcPts val="500"/>
-              </a:spcBef>
-              <a:buFont typeface="Arial" panose="020B0604020202020204" pitchFamily="34" charset="0"/>
-              <a:buChar char="•"/>
-              <a:tabLst/>
-              <a:defRPr sz="1200" b="0" i="0">
-                <a:solidFill>
-                  <a:schemeClr val="lt1"/>
-                </a:solidFill>
-              </a:defRPr>
-            </a:lvl5pPr>
-            <a:lvl6pPr marL="758825" indent="-177800">
-              <a:lnSpc>
-                <a:spcPct val="100000"/>
-              </a:lnSpc>
-              <a:spcBef>
-                <a:spcPts val="500"/>
-              </a:spcBef>
-              <a:buFont typeface="Arial" panose="020B0604020202020204" pitchFamily="34" charset="0"/>
-              <a:buChar char="•"/>
-              <a:tabLst/>
-              <a:defRPr sz="1400">
-                <a:solidFill>
-                  <a:schemeClr val="lt1"/>
-                </a:solidFill>
-              </a:defRPr>
-            </a:lvl6pPr>
-            <a:lvl7pPr marL="758825" indent="-177800">
-              <a:lnSpc>
-                <a:spcPct val="100000"/>
-              </a:lnSpc>
-              <a:spcBef>
-                <a:spcPts val="500"/>
-              </a:spcBef>
-              <a:buFont typeface="Arial" panose="020B0604020202020204" pitchFamily="34" charset="0"/>
-              <a:buChar char="•"/>
-              <a:tabLst/>
-              <a:defRPr sz="1400">
-                <a:solidFill>
-                  <a:schemeClr val="lt1"/>
-                </a:solidFill>
-              </a:defRPr>
-            </a:lvl7pPr>
-            <a:lvl8pPr marL="758825" indent="-177800">
-              <a:lnSpc>
-                <a:spcPct val="100000"/>
-              </a:lnSpc>
-              <a:spcBef>
-                <a:spcPts val="500"/>
-              </a:spcBef>
-              <a:buFont typeface="Arial" panose="020B0604020202020204" pitchFamily="34" charset="0"/>
-              <a:buChar char="•"/>
-              <a:tabLst/>
-              <a:defRPr sz="1400">
-                <a:solidFill>
-                  <a:schemeClr val="lt1"/>
-                </a:solidFill>
-              </a:defRPr>
-            </a:lvl8pPr>
-            <a:lvl9pPr marL="581025" indent="0">
-              <a:lnSpc>
-                <a:spcPct val="100000"/>
-              </a:lnSpc>
-              <a:spcBef>
-                <a:spcPts val="500"/>
-              </a:spcBef>
-              <a:buFont typeface="Arial" panose="020B0604020202020204" pitchFamily="34" charset="0"/>
-              <a:buNone/>
-              <a:tabLst/>
-              <a:defRPr sz="1400">
-                <a:solidFill>
-                  <a:schemeClr val="lt1"/>
-                </a:solidFill>
-              </a:defRPr>
-            </a:lvl9pPr>
-          </a:lstStyle>
-          <a:p>
-            <a:endParaRPr lang="en-US" b="1" dirty="0"/>
-          </a:p>
-        </p:txBody>
-      </p:sp>
-      <p:sp>
-        <p:nvSpPr>
-          <p:cNvPr id="18" name="Text Placeholder 5">
-            <a:extLst>
-              <a:ext uri="{FF2B5EF4-FFF2-40B4-BE49-F238E27FC236}">
-                <a16:creationId xmlns:a16="http://schemas.microsoft.com/office/drawing/2014/main" id="{F51643C2-EABE-E551-018B-251B08C770BB}"/>
-              </a:ext>
-            </a:extLst>
-          </p:cNvPr>
-          <p:cNvSpPr txBox="1">
-            <a:spLocks/>
-          </p:cNvSpPr>
-          <p:nvPr userDrawn="1"/>
-        </p:nvSpPr>
-        <p:spPr>
-          <a:xfrm>
-            <a:off x="4202515" y="2524343"/>
-            <a:ext cx="2469447" cy="413209"/>
-          </a:xfrm>
-          <a:prstGeom prst="roundRect">
-            <a:avLst>
-              <a:gd name="adj" fmla="val 19110"/>
-            </a:avLst>
-          </a:prstGeom>
-          <a:solidFill>
-            <a:schemeClr val="bg2"/>
-          </a:solidFill>
-          <a:ln w="19050" cap="flat" cmpd="sng" algn="ctr">
-            <a:gradFill flip="none" rotWithShape="1">
-              <a:gsLst>
-                <a:gs pos="0">
-                  <a:schemeClr val="accent1"/>
-                </a:gs>
-                <a:gs pos="100000">
-                  <a:schemeClr val="accent2"/>
-                </a:gs>
-              </a:gsLst>
-              <a:lin ang="0" scaled="1"/>
-              <a:tileRect/>
-            </a:gradFill>
-            <a:prstDash val="solid"/>
-            <a:miter lim="800000"/>
-          </a:ln>
-          <a:effectLst>
-            <a:outerShdw blurRad="288898" sx="102000" sy="102000" algn="ctr" rotWithShape="0">
-              <a:schemeClr val="accent1">
-                <a:alpha val="18227"/>
-              </a:schemeClr>
-            </a:outerShdw>
-          </a:effectLst>
-        </p:spPr>
-        <p:txBody>
-          <a:bodyPr vert="horz" lIns="274320" tIns="0" rIns="0" bIns="0" rtlCol="0" anchor="ctr">
-            <a:noAutofit/>
-          </a:bodyPr>
-          <a:lstStyle>
-            <a:defPPr>
-              <a:defRPr lang="en-US"/>
-            </a:defPPr>
-            <a:lvl1pPr indent="0">
-              <a:lnSpc>
-                <a:spcPct val="100000"/>
-              </a:lnSpc>
-              <a:spcBef>
-                <a:spcPts val="1000"/>
-              </a:spcBef>
-              <a:buFont typeface="Arial" panose="020B0604020202020204" pitchFamily="34" charset="0"/>
-              <a:buNone/>
-              <a:defRPr sz="1400" b="0" i="0"/>
-            </a:lvl1pPr>
-            <a:lvl2pPr marL="225425" indent="-214313">
-              <a:lnSpc>
-                <a:spcPct val="100000"/>
-              </a:lnSpc>
-              <a:spcBef>
-                <a:spcPts val="500"/>
-              </a:spcBef>
-              <a:buFont typeface="Arial" panose="020B0604020202020204" pitchFamily="34" charset="0"/>
-              <a:buChar char="•"/>
-              <a:tabLst/>
-              <a:defRPr sz="1600" b="0" i="0">
-                <a:solidFill>
-                  <a:schemeClr val="lt1"/>
-                </a:solidFill>
-              </a:defRPr>
-            </a:lvl2pPr>
-            <a:lvl3pPr marL="403225" indent="-177800">
-              <a:lnSpc>
-                <a:spcPct val="100000"/>
-              </a:lnSpc>
-              <a:spcBef>
-                <a:spcPts val="500"/>
-              </a:spcBef>
-              <a:buFont typeface="Arial" panose="020B0604020202020204" pitchFamily="34" charset="0"/>
-              <a:buChar char="•"/>
-              <a:tabLst/>
-              <a:defRPr sz="1400" b="0" i="0">
-                <a:solidFill>
-                  <a:schemeClr val="lt1"/>
-                </a:solidFill>
-              </a:defRPr>
-            </a:lvl3pPr>
-            <a:lvl4pPr marL="581025" indent="-177800">
-              <a:lnSpc>
-                <a:spcPct val="100000"/>
-              </a:lnSpc>
-              <a:spcBef>
-                <a:spcPts val="500"/>
-              </a:spcBef>
-              <a:buFont typeface="Arial" panose="020B0604020202020204" pitchFamily="34" charset="0"/>
-              <a:buChar char="•"/>
-              <a:tabLst/>
-              <a:defRPr sz="1200" b="0" i="0">
-                <a:solidFill>
-                  <a:schemeClr val="lt1"/>
-                </a:solidFill>
-              </a:defRPr>
-            </a:lvl4pPr>
-            <a:lvl5pPr marL="758825" indent="-177800">
-              <a:lnSpc>
-                <a:spcPct val="100000"/>
-              </a:lnSpc>
-              <a:spcBef>
-                <a:spcPts val="500"/>
-              </a:spcBef>
-              <a:buFont typeface="Arial" panose="020B0604020202020204" pitchFamily="34" charset="0"/>
-              <a:buChar char="•"/>
-              <a:tabLst/>
-              <a:defRPr sz="1200" b="0" i="0">
-                <a:solidFill>
-                  <a:schemeClr val="lt1"/>
-                </a:solidFill>
-              </a:defRPr>
-            </a:lvl5pPr>
-            <a:lvl6pPr marL="758825" indent="-177800">
-              <a:lnSpc>
-                <a:spcPct val="100000"/>
-              </a:lnSpc>
-              <a:spcBef>
-                <a:spcPts val="500"/>
-              </a:spcBef>
-              <a:buFont typeface="Arial" panose="020B0604020202020204" pitchFamily="34" charset="0"/>
-              <a:buChar char="•"/>
-              <a:tabLst/>
-              <a:defRPr sz="1400">
-                <a:solidFill>
-                  <a:schemeClr val="lt1"/>
-                </a:solidFill>
-              </a:defRPr>
-            </a:lvl6pPr>
-            <a:lvl7pPr marL="758825" indent="-177800">
-              <a:lnSpc>
-                <a:spcPct val="100000"/>
-              </a:lnSpc>
-              <a:spcBef>
-                <a:spcPts val="500"/>
-              </a:spcBef>
-              <a:buFont typeface="Arial" panose="020B0604020202020204" pitchFamily="34" charset="0"/>
-              <a:buChar char="•"/>
-              <a:tabLst/>
-              <a:defRPr sz="1400">
-                <a:solidFill>
-                  <a:schemeClr val="lt1"/>
-                </a:solidFill>
-              </a:defRPr>
-            </a:lvl7pPr>
-            <a:lvl8pPr marL="758825" indent="-177800">
-              <a:lnSpc>
-                <a:spcPct val="100000"/>
-              </a:lnSpc>
-              <a:spcBef>
-                <a:spcPts val="500"/>
-              </a:spcBef>
-              <a:buFont typeface="Arial" panose="020B0604020202020204" pitchFamily="34" charset="0"/>
-              <a:buChar char="•"/>
-              <a:tabLst/>
-              <a:defRPr sz="1400">
-                <a:solidFill>
-                  <a:schemeClr val="lt1"/>
-                </a:solidFill>
-              </a:defRPr>
-            </a:lvl8pPr>
-            <a:lvl9pPr marL="581025" indent="0">
-              <a:lnSpc>
-                <a:spcPct val="100000"/>
-              </a:lnSpc>
-              <a:spcBef>
-                <a:spcPts val="500"/>
-              </a:spcBef>
-              <a:buFont typeface="Arial" panose="020B0604020202020204" pitchFamily="34" charset="0"/>
-              <a:buNone/>
-              <a:tabLst/>
-              <a:defRPr sz="1400">
-                <a:solidFill>
-                  <a:schemeClr val="lt1"/>
-                </a:solidFill>
-              </a:defRPr>
-            </a:lvl9pPr>
-          </a:lstStyle>
-          <a:p>
-            <a:r>
-              <a:rPr lang="en-US" b="1" dirty="0">
-                <a:solidFill>
-                  <a:schemeClr val="tx2"/>
-                </a:solidFill>
-                <a:latin typeface="+mj-lt"/>
-              </a:rPr>
-              <a:t>Campaign Summary</a:t>
-            </a:r>
-          </a:p>
-        </p:txBody>
-      </p:sp>
-    </p:spTree>
-    <p:extLst>
-      <p:ext uri="{BB962C8B-B14F-4D97-AF65-F5344CB8AC3E}">
-        <p14:creationId xmlns:p14="http://schemas.microsoft.com/office/powerpoint/2010/main" val="3146309416"/>
-      </p:ext>
-    </p:extLst>
-  </p:cSld>
-  <p:clrMapOvr>
-    <a:masterClrMapping/>
-  </p:clrMapOvr>
-  <p:extLst>
-    <p:ext uri="{DCECCB84-F9BA-43D5-87BE-67443E8EF086}">
-      <p15:sldGuideLst xmlns:p15="http://schemas.microsoft.com/office/powerpoint/2012/main"/>
-    </p:ext>
-  </p:extLst>
-</p:sldLayout>
-</file>
-
-<file path=ppt/slideLayouts/slideLayout3.xml><?xml version="1.0" encoding="utf-8"?>
 <p:sldLayout xmlns:a="http://schemas.openxmlformats.org/drawingml/2006/main" xmlns:r="http://schemas.openxmlformats.org/officeDocument/2006/relationships" xmlns:p="http://schemas.openxmlformats.org/presentationml/2006/main" preserve="1" userDrawn="1">
   <p:cSld name="Agenda">
     <p:spTree>
@@ -3958,7 +2317,7 @@
           <a:p>
             <a:fld id="{490F82D5-E79D-AA43-A25E-D6C391467F8C}" type="datetime1">
               <a:rPr lang="en-CA" smtClean="0"/>
-              <a:t>2026-03-10</a:t>
+              <a:t>2026-03-24</a:t>
             </a:fld>
             <a:endParaRPr lang="en-US" dirty="0"/>
           </a:p>
@@ -5510,1603 +3869,6 @@
 </p:sldLayout>
 </file>
 
-<file path=ppt/slideLayouts/slideLayout4.xml><?xml version="1.0" encoding="utf-8"?>
-<p:sldLayout xmlns:a="http://schemas.openxmlformats.org/drawingml/2006/main" xmlns:r="http://schemas.openxmlformats.org/officeDocument/2006/relationships" xmlns:p="http://schemas.openxmlformats.org/presentationml/2006/main" userDrawn="1">
-  <p:cSld name="1_Agenda">
-    <p:spTree>
-      <p:nvGrpSpPr>
-        <p:cNvPr id="1" name=""/>
-        <p:cNvGrpSpPr/>
-        <p:nvPr/>
-      </p:nvGrpSpPr>
-      <p:grpSpPr>
-        <a:xfrm>
-          <a:off x="0" y="0"/>
-          <a:ext cx="0" cy="0"/>
-          <a:chOff x="0" y="0"/>
-          <a:chExt cx="0" cy="0"/>
-        </a:xfrm>
-      </p:grpSpPr>
-      <p:sp>
-        <p:nvSpPr>
-          <p:cNvPr id="4" name="Date Placeholder 3">
-            <a:extLst>
-              <a:ext uri="{FF2B5EF4-FFF2-40B4-BE49-F238E27FC236}">
-                <a16:creationId xmlns:a16="http://schemas.microsoft.com/office/drawing/2014/main" id="{03E951F8-4E0A-4761-EE19-A087CB2CD62A}"/>
-              </a:ext>
-            </a:extLst>
-          </p:cNvPr>
-          <p:cNvSpPr>
-            <a:spLocks noGrp="1" noRot="1" noMove="1" noResize="1" noEditPoints="1" noAdjustHandles="1" noChangeArrowheads="1" noChangeShapeType="1"/>
-          </p:cNvSpPr>
-          <p:nvPr>
-            <p:ph type="dt" sz="half" idx="10"/>
-          </p:nvPr>
-        </p:nvSpPr>
-        <p:spPr>
-          <a:xfrm flipH="1">
-            <a:off x="-84287" y="-3175"/>
-            <a:ext cx="0" cy="0"/>
-          </a:xfrm>
-        </p:spPr>
-        <p:txBody>
-          <a:bodyPr/>
-          <a:lstStyle/>
-          <a:p>
-            <a:fld id="{490F82D5-E79D-AA43-A25E-D6C391467F8C}" type="datetime1">
-              <a:rPr lang="en-CA" smtClean="0"/>
-              <a:t>2026-03-10</a:t>
-            </a:fld>
-            <a:endParaRPr lang="en-US" dirty="0"/>
-          </a:p>
-        </p:txBody>
-      </p:sp>
-      <p:sp>
-        <p:nvSpPr>
-          <p:cNvPr id="9" name="Rectangle 8">
-            <a:extLst>
-              <a:ext uri="{FF2B5EF4-FFF2-40B4-BE49-F238E27FC236}">
-                <a16:creationId xmlns:a16="http://schemas.microsoft.com/office/drawing/2014/main" id="{F8234A10-CF88-25DB-0542-C012E61E0696}"/>
-              </a:ext>
-            </a:extLst>
-          </p:cNvPr>
-          <p:cNvSpPr/>
-          <p:nvPr userDrawn="1"/>
-        </p:nvSpPr>
-        <p:spPr>
-          <a:xfrm>
-            <a:off x="0" y="6802244"/>
-            <a:ext cx="12192000" cy="55756"/>
-          </a:xfrm>
-          <a:prstGeom prst="rect">
-            <a:avLst/>
-          </a:prstGeom>
-          <a:gradFill>
-            <a:gsLst>
-              <a:gs pos="15000">
-                <a:schemeClr val="accent1"/>
-              </a:gs>
-              <a:gs pos="85000">
-                <a:schemeClr val="accent2"/>
-              </a:gs>
-            </a:gsLst>
-            <a:lin ang="0" scaled="0"/>
-          </a:gradFill>
-          <a:ln>
-            <a:noFill/>
-          </a:ln>
-        </p:spPr>
-        <p:style>
-          <a:lnRef idx="2">
-            <a:schemeClr val="accent1">
-              <a:shade val="50000"/>
-            </a:schemeClr>
-          </a:lnRef>
-          <a:fillRef idx="1">
-            <a:schemeClr val="accent1"/>
-          </a:fillRef>
-          <a:effectRef idx="0">
-            <a:schemeClr val="accent1"/>
-          </a:effectRef>
-          <a:fontRef idx="minor">
-            <a:schemeClr val="lt1"/>
-          </a:fontRef>
-        </p:style>
-        <p:txBody>
-          <a:bodyPr rot="0" spcFirstLastPara="0" vertOverflow="overflow" horzOverflow="overflow" vert="horz" wrap="square" lIns="91440" tIns="45720" rIns="91440" bIns="45720" numCol="1" spcCol="0" rtlCol="0" fromWordArt="0" anchor="t" anchorCtr="0" forceAA="0" compatLnSpc="1">
-            <a:prstTxWarp prst="textNoShape">
-              <a:avLst/>
-            </a:prstTxWarp>
-            <a:noAutofit/>
-          </a:bodyPr>
-          <a:lstStyle/>
-          <a:p>
-            <a:pPr algn="ctr">
-              <a:spcBef>
-                <a:spcPts val="900"/>
-              </a:spcBef>
-            </a:pPr>
-            <a:endParaRPr lang="en-US" sz="2000" b="0" i="0" dirty="0">
-              <a:latin typeface="Spectrum Sans" panose="020B0502020503020304" pitchFamily="34" charset="0"/>
-              <a:cs typeface="Spectrum Sans" panose="020B0502020503020304" pitchFamily="34" charset="0"/>
-            </a:endParaRPr>
-          </a:p>
-        </p:txBody>
-      </p:sp>
-      <p:grpSp>
-        <p:nvGrpSpPr>
-          <p:cNvPr id="2" name="Group 1">
-            <a:extLst>
-              <a:ext uri="{FF2B5EF4-FFF2-40B4-BE49-F238E27FC236}">
-                <a16:creationId xmlns:a16="http://schemas.microsoft.com/office/drawing/2014/main" id="{5F7813AD-4E35-9E50-4055-6A0334B4C525}"/>
-              </a:ext>
-            </a:extLst>
-          </p:cNvPr>
-          <p:cNvGrpSpPr/>
-          <p:nvPr userDrawn="1"/>
-        </p:nvGrpSpPr>
-        <p:grpSpPr>
-          <a:xfrm>
-            <a:off x="4203082" y="339498"/>
-            <a:ext cx="7682808" cy="1852235"/>
-            <a:chOff x="4203082" y="339498"/>
-            <a:chExt cx="7682808" cy="1852235"/>
-          </a:xfrm>
-        </p:grpSpPr>
-        <p:grpSp>
-          <p:nvGrpSpPr>
-            <p:cNvPr id="3" name="Group 2">
-              <a:extLst>
-                <a:ext uri="{FF2B5EF4-FFF2-40B4-BE49-F238E27FC236}">
-                  <a16:creationId xmlns:a16="http://schemas.microsoft.com/office/drawing/2014/main" id="{8BF07B51-942E-121D-BE6D-3C8956E84532}"/>
-                </a:ext>
-              </a:extLst>
-            </p:cNvPr>
-            <p:cNvGrpSpPr/>
-            <p:nvPr/>
-          </p:nvGrpSpPr>
-          <p:grpSpPr>
-            <a:xfrm>
-              <a:off x="4203082" y="339498"/>
-              <a:ext cx="3660706" cy="1852235"/>
-              <a:chOff x="4203082" y="339498"/>
-              <a:chExt cx="3660706" cy="1852235"/>
-            </a:xfrm>
-          </p:grpSpPr>
-          <p:sp>
-            <p:nvSpPr>
-              <p:cNvPr id="12" name="Text Placeholder 5">
-                <a:extLst>
-                  <a:ext uri="{FF2B5EF4-FFF2-40B4-BE49-F238E27FC236}">
-                    <a16:creationId xmlns:a16="http://schemas.microsoft.com/office/drawing/2014/main" id="{507E24C1-9062-9441-7D9E-EF3CE63FB299}"/>
-                  </a:ext>
-                </a:extLst>
-              </p:cNvPr>
-              <p:cNvSpPr txBox="1">
-                <a:spLocks/>
-              </p:cNvSpPr>
-              <p:nvPr/>
-            </p:nvSpPr>
-            <p:spPr>
-              <a:xfrm>
-                <a:off x="4206188" y="545813"/>
-                <a:ext cx="3657600" cy="1645920"/>
-              </a:xfrm>
-              <a:prstGeom prst="roundRect">
-                <a:avLst>
-                  <a:gd name="adj" fmla="val 5698"/>
-                </a:avLst>
-              </a:prstGeom>
-              <a:solidFill>
-                <a:schemeClr val="bg2"/>
-              </a:solidFill>
-              <a:ln w="19050" cap="flat" cmpd="sng" algn="ctr">
-                <a:gradFill flip="none" rotWithShape="1">
-                  <a:gsLst>
-                    <a:gs pos="0">
-                      <a:schemeClr val="accent1"/>
-                    </a:gs>
-                    <a:gs pos="100000">
-                      <a:schemeClr val="accent2"/>
-                    </a:gs>
-                  </a:gsLst>
-                  <a:lin ang="0" scaled="1"/>
-                  <a:tileRect/>
-                </a:gradFill>
-                <a:prstDash val="solid"/>
-                <a:miter lim="800000"/>
-              </a:ln>
-              <a:effectLst>
-                <a:outerShdw blurRad="288898" sx="102000" sy="102000" algn="ctr" rotWithShape="0">
-                  <a:schemeClr val="accent1">
-                    <a:alpha val="18227"/>
-                  </a:schemeClr>
-                </a:outerShdw>
-              </a:effectLst>
-            </p:spPr>
-            <p:txBody>
-              <a:bodyPr vert="horz" lIns="274320" tIns="228600" rIns="0" bIns="182880" rtlCol="0" anchor="t">
-                <a:noAutofit/>
-              </a:bodyPr>
-              <a:lstStyle>
-                <a:lvl1pPr marL="0" indent="0" algn="l" defTabSz="914400" rtl="0" eaLnBrk="1" latinLnBrk="0" hangingPunct="1">
-                  <a:lnSpc>
-                    <a:spcPct val="100000"/>
-                  </a:lnSpc>
-                  <a:spcBef>
-                    <a:spcPts val="1000"/>
-                  </a:spcBef>
-                  <a:buFont typeface="Arial" panose="020B0604020202020204" pitchFamily="34" charset="0"/>
-                  <a:buNone/>
-                  <a:defRPr lang="en-US" sz="100" b="0" i="0" kern="1200">
-                    <a:noFill/>
-                    <a:latin typeface="+mn-lt"/>
-                    <a:ea typeface="+mn-ea"/>
-                    <a:cs typeface="+mn-cs"/>
-                  </a:defRPr>
-                </a:lvl1pPr>
-                <a:lvl2pPr marL="225425" indent="-214313" algn="l" defTabSz="914400" rtl="0" eaLnBrk="1" latinLnBrk="0" hangingPunct="1">
-                  <a:lnSpc>
-                    <a:spcPct val="100000"/>
-                  </a:lnSpc>
-                  <a:spcBef>
-                    <a:spcPts val="500"/>
-                  </a:spcBef>
-                  <a:buFont typeface="Arial" panose="020B0604020202020204" pitchFamily="34" charset="0"/>
-                  <a:buChar char="•"/>
-                  <a:tabLst/>
-                  <a:defRPr sz="1600" b="0" i="0" kern="1200">
-                    <a:solidFill>
-                      <a:schemeClr val="lt1"/>
-                    </a:solidFill>
-                    <a:latin typeface="+mn-lt"/>
-                    <a:ea typeface="+mn-ea"/>
-                    <a:cs typeface="+mn-cs"/>
-                  </a:defRPr>
-                </a:lvl2pPr>
-                <a:lvl3pPr marL="403225" indent="-177800" algn="l" defTabSz="914400" rtl="0" eaLnBrk="1" latinLnBrk="0" hangingPunct="1">
-                  <a:lnSpc>
-                    <a:spcPct val="100000"/>
-                  </a:lnSpc>
-                  <a:spcBef>
-                    <a:spcPts val="500"/>
-                  </a:spcBef>
-                  <a:buFont typeface="Arial" panose="020B0604020202020204" pitchFamily="34" charset="0"/>
-                  <a:buChar char="•"/>
-                  <a:tabLst/>
-                  <a:defRPr sz="1400" b="0" i="0" kern="1200">
-                    <a:solidFill>
-                      <a:schemeClr val="lt1"/>
-                    </a:solidFill>
-                    <a:latin typeface="+mn-lt"/>
-                    <a:ea typeface="+mn-ea"/>
-                    <a:cs typeface="+mn-cs"/>
-                  </a:defRPr>
-                </a:lvl3pPr>
-                <a:lvl4pPr marL="581025" indent="-177800" algn="l" defTabSz="914400" rtl="0" eaLnBrk="1" latinLnBrk="0" hangingPunct="1">
-                  <a:lnSpc>
-                    <a:spcPct val="100000"/>
-                  </a:lnSpc>
-                  <a:spcBef>
-                    <a:spcPts val="500"/>
-                  </a:spcBef>
-                  <a:buFont typeface="Arial" panose="020B0604020202020204" pitchFamily="34" charset="0"/>
-                  <a:buChar char="•"/>
-                  <a:tabLst/>
-                  <a:defRPr sz="1200" b="0" i="0" kern="1200">
-                    <a:solidFill>
-                      <a:schemeClr val="lt1"/>
-                    </a:solidFill>
-                    <a:latin typeface="+mn-lt"/>
-                    <a:ea typeface="+mn-ea"/>
-                    <a:cs typeface="+mn-cs"/>
-                  </a:defRPr>
-                </a:lvl4pPr>
-                <a:lvl5pPr marL="758825" indent="-177800" algn="l" defTabSz="914400" rtl="0" eaLnBrk="1" latinLnBrk="0" hangingPunct="1">
-                  <a:lnSpc>
-                    <a:spcPct val="100000"/>
-                  </a:lnSpc>
-                  <a:spcBef>
-                    <a:spcPts val="500"/>
-                  </a:spcBef>
-                  <a:buFont typeface="Arial" panose="020B0604020202020204" pitchFamily="34" charset="0"/>
-                  <a:buChar char="•"/>
-                  <a:tabLst/>
-                  <a:defRPr sz="1200" b="0" i="0" kern="1200">
-                    <a:solidFill>
-                      <a:schemeClr val="lt1"/>
-                    </a:solidFill>
-                    <a:latin typeface="+mn-lt"/>
-                    <a:ea typeface="+mn-ea"/>
-                    <a:cs typeface="+mn-cs"/>
-                  </a:defRPr>
-                </a:lvl5pPr>
-                <a:lvl6pPr marL="758825" indent="-177800" algn="l" defTabSz="914400" rtl="0" eaLnBrk="1" latinLnBrk="0" hangingPunct="1">
-                  <a:lnSpc>
-                    <a:spcPct val="100000"/>
-                  </a:lnSpc>
-                  <a:spcBef>
-                    <a:spcPts val="500"/>
-                  </a:spcBef>
-                  <a:buFont typeface="Arial" panose="020B0604020202020204" pitchFamily="34" charset="0"/>
-                  <a:buChar char="•"/>
-                  <a:tabLst/>
-                  <a:defRPr sz="1400" kern="1200">
-                    <a:solidFill>
-                      <a:schemeClr val="lt1"/>
-                    </a:solidFill>
-                    <a:latin typeface="+mn-lt"/>
-                    <a:ea typeface="+mn-ea"/>
-                    <a:cs typeface="+mn-cs"/>
-                  </a:defRPr>
-                </a:lvl6pPr>
-                <a:lvl7pPr marL="758825" indent="-177800" algn="l" defTabSz="914400" rtl="0" eaLnBrk="1" latinLnBrk="0" hangingPunct="1">
-                  <a:lnSpc>
-                    <a:spcPct val="100000"/>
-                  </a:lnSpc>
-                  <a:spcBef>
-                    <a:spcPts val="500"/>
-                  </a:spcBef>
-                  <a:buFont typeface="Arial" panose="020B0604020202020204" pitchFamily="34" charset="0"/>
-                  <a:buChar char="•"/>
-                  <a:tabLst/>
-                  <a:defRPr sz="1400" kern="1200">
-                    <a:solidFill>
-                      <a:schemeClr val="lt1"/>
-                    </a:solidFill>
-                    <a:latin typeface="+mn-lt"/>
-                    <a:ea typeface="+mn-ea"/>
-                    <a:cs typeface="+mn-cs"/>
-                  </a:defRPr>
-                </a:lvl7pPr>
-                <a:lvl8pPr marL="758825" indent="-177800" algn="l" defTabSz="914400" rtl="0" eaLnBrk="1" latinLnBrk="0" hangingPunct="1">
-                  <a:lnSpc>
-                    <a:spcPct val="100000"/>
-                  </a:lnSpc>
-                  <a:spcBef>
-                    <a:spcPts val="500"/>
-                  </a:spcBef>
-                  <a:buFont typeface="Arial" panose="020B0604020202020204" pitchFamily="34" charset="0"/>
-                  <a:buChar char="•"/>
-                  <a:tabLst/>
-                  <a:defRPr sz="1400" kern="1200">
-                    <a:solidFill>
-                      <a:schemeClr val="lt1"/>
-                    </a:solidFill>
-                    <a:latin typeface="+mn-lt"/>
-                    <a:ea typeface="+mn-ea"/>
-                    <a:cs typeface="+mn-cs"/>
-                  </a:defRPr>
-                </a:lvl8pPr>
-                <a:lvl9pPr marL="581025" indent="0" algn="l" defTabSz="914400" rtl="0" eaLnBrk="1" latinLnBrk="0" hangingPunct="1">
-                  <a:lnSpc>
-                    <a:spcPct val="100000"/>
-                  </a:lnSpc>
-                  <a:spcBef>
-                    <a:spcPts val="500"/>
-                  </a:spcBef>
-                  <a:buFont typeface="Arial" panose="020B0604020202020204" pitchFamily="34" charset="0"/>
-                  <a:buNone/>
-                  <a:tabLst/>
-                  <a:defRPr sz="1400" kern="1200">
-                    <a:solidFill>
-                      <a:schemeClr val="lt1"/>
-                    </a:solidFill>
-                    <a:latin typeface="+mn-lt"/>
-                    <a:ea typeface="+mn-ea"/>
-                    <a:cs typeface="+mn-cs"/>
-                  </a:defRPr>
-                </a:lvl9pPr>
-              </a:lstStyle>
-              <a:p>
-                <a:pPr marL="0" marR="0" lvl="0" indent="0" algn="l" defTabSz="91440" rtl="0" eaLnBrk="1" fontAlgn="auto" latinLnBrk="0" hangingPunct="1">
-                  <a:lnSpc>
-                    <a:spcPct val="100000"/>
-                  </a:lnSpc>
-                  <a:spcBef>
-                    <a:spcPts val="300"/>
-                  </a:spcBef>
-                  <a:spcAft>
-                    <a:spcPts val="0"/>
-                  </a:spcAft>
-                  <a:buClrTx/>
-                  <a:buSzTx/>
-                  <a:buFont typeface="Arial" panose="020B0604020202020204" pitchFamily="34" charset="0"/>
-                  <a:buNone/>
-                  <a:tabLst/>
-                  <a:defRPr/>
-                </a:pPr>
-                <a:endParaRPr kumimoji="0" lang="en-US" sz="1200" b="0" i="0" u="none" strike="noStrike" kern="1200" cap="none" spc="0" normalizeH="0" baseline="0" noProof="0" dirty="0">
-                  <a:ln>
-                    <a:noFill/>
-                  </a:ln>
-                  <a:solidFill>
-                    <a:srgbClr val="FFFFFF"/>
-                  </a:solidFill>
-                  <a:effectLst/>
-                  <a:uLnTx/>
-                  <a:uFillTx/>
-                  <a:latin typeface="Spectrum Sans Book" panose="02110004020202020204"/>
-                  <a:ea typeface="+mn-ea"/>
-                  <a:cs typeface="+mn-cs"/>
-                </a:endParaRPr>
-              </a:p>
-            </p:txBody>
-          </p:sp>
-          <p:sp>
-            <p:nvSpPr>
-              <p:cNvPr id="13" name="Text Placeholder 5">
-                <a:extLst>
-                  <a:ext uri="{FF2B5EF4-FFF2-40B4-BE49-F238E27FC236}">
-                    <a16:creationId xmlns:a16="http://schemas.microsoft.com/office/drawing/2014/main" id="{22D6CD2E-C902-7D88-D37E-3A7E0CFD2FA0}"/>
-                  </a:ext>
-                </a:extLst>
-              </p:cNvPr>
-              <p:cNvSpPr txBox="1">
-                <a:spLocks/>
-              </p:cNvSpPr>
-              <p:nvPr/>
-            </p:nvSpPr>
-            <p:spPr>
-              <a:xfrm>
-                <a:off x="4203082" y="339498"/>
-                <a:ext cx="2468880" cy="413209"/>
-              </a:xfrm>
-              <a:prstGeom prst="roundRect">
-                <a:avLst>
-                  <a:gd name="adj" fmla="val 19110"/>
-                </a:avLst>
-              </a:prstGeom>
-              <a:solidFill>
-                <a:schemeClr val="bg2"/>
-              </a:solidFill>
-              <a:ln w="19050" cap="flat" cmpd="sng" algn="ctr">
-                <a:gradFill flip="none" rotWithShape="1">
-                  <a:gsLst>
-                    <a:gs pos="0">
-                      <a:schemeClr val="accent1"/>
-                    </a:gs>
-                    <a:gs pos="100000">
-                      <a:schemeClr val="accent2"/>
-                    </a:gs>
-                  </a:gsLst>
-                  <a:lin ang="0" scaled="1"/>
-                  <a:tileRect/>
-                </a:gradFill>
-                <a:prstDash val="solid"/>
-                <a:miter lim="800000"/>
-              </a:ln>
-              <a:effectLst>
-                <a:outerShdw blurRad="288898" sx="102000" sy="102000" algn="ctr" rotWithShape="0">
-                  <a:schemeClr val="accent1">
-                    <a:alpha val="18227"/>
-                  </a:schemeClr>
-                </a:outerShdw>
-              </a:effectLst>
-            </p:spPr>
-            <p:txBody>
-              <a:bodyPr vert="horz" lIns="274320" tIns="0" rIns="0" bIns="0" rtlCol="0" anchor="ctr">
-                <a:noAutofit/>
-              </a:bodyPr>
-              <a:lstStyle>
-                <a:defPPr>
-                  <a:defRPr lang="en-US"/>
-                </a:defPPr>
-                <a:lvl1pPr indent="0">
-                  <a:lnSpc>
-                    <a:spcPct val="100000"/>
-                  </a:lnSpc>
-                  <a:spcBef>
-                    <a:spcPts val="1000"/>
-                  </a:spcBef>
-                  <a:buFont typeface="Arial" panose="020B0604020202020204" pitchFamily="34" charset="0"/>
-                  <a:buNone/>
-                  <a:defRPr sz="1400" b="0" i="0"/>
-                </a:lvl1pPr>
-                <a:lvl2pPr marL="225425" indent="-214313">
-                  <a:lnSpc>
-                    <a:spcPct val="100000"/>
-                  </a:lnSpc>
-                  <a:spcBef>
-                    <a:spcPts val="500"/>
-                  </a:spcBef>
-                  <a:buFont typeface="Arial" panose="020B0604020202020204" pitchFamily="34" charset="0"/>
-                  <a:buChar char="•"/>
-                  <a:tabLst/>
-                  <a:defRPr sz="1600" b="0" i="0">
-                    <a:solidFill>
-                      <a:schemeClr val="lt1"/>
-                    </a:solidFill>
-                  </a:defRPr>
-                </a:lvl2pPr>
-                <a:lvl3pPr marL="403225" indent="-177800">
-                  <a:lnSpc>
-                    <a:spcPct val="100000"/>
-                  </a:lnSpc>
-                  <a:spcBef>
-                    <a:spcPts val="500"/>
-                  </a:spcBef>
-                  <a:buFont typeface="Arial" panose="020B0604020202020204" pitchFamily="34" charset="0"/>
-                  <a:buChar char="•"/>
-                  <a:tabLst/>
-                  <a:defRPr sz="1400" b="0" i="0">
-                    <a:solidFill>
-                      <a:schemeClr val="lt1"/>
-                    </a:solidFill>
-                  </a:defRPr>
-                </a:lvl3pPr>
-                <a:lvl4pPr marL="581025" indent="-177800">
-                  <a:lnSpc>
-                    <a:spcPct val="100000"/>
-                  </a:lnSpc>
-                  <a:spcBef>
-                    <a:spcPts val="500"/>
-                  </a:spcBef>
-                  <a:buFont typeface="Arial" panose="020B0604020202020204" pitchFamily="34" charset="0"/>
-                  <a:buChar char="•"/>
-                  <a:tabLst/>
-                  <a:defRPr sz="1200" b="0" i="0">
-                    <a:solidFill>
-                      <a:schemeClr val="lt1"/>
-                    </a:solidFill>
-                  </a:defRPr>
-                </a:lvl4pPr>
-                <a:lvl5pPr marL="758825" indent="-177800">
-                  <a:lnSpc>
-                    <a:spcPct val="100000"/>
-                  </a:lnSpc>
-                  <a:spcBef>
-                    <a:spcPts val="500"/>
-                  </a:spcBef>
-                  <a:buFont typeface="Arial" panose="020B0604020202020204" pitchFamily="34" charset="0"/>
-                  <a:buChar char="•"/>
-                  <a:tabLst/>
-                  <a:defRPr sz="1200" b="0" i="0">
-                    <a:solidFill>
-                      <a:schemeClr val="lt1"/>
-                    </a:solidFill>
-                  </a:defRPr>
-                </a:lvl5pPr>
-                <a:lvl6pPr marL="758825" indent="-177800">
-                  <a:lnSpc>
-                    <a:spcPct val="100000"/>
-                  </a:lnSpc>
-                  <a:spcBef>
-                    <a:spcPts val="500"/>
-                  </a:spcBef>
-                  <a:buFont typeface="Arial" panose="020B0604020202020204" pitchFamily="34" charset="0"/>
-                  <a:buChar char="•"/>
-                  <a:tabLst/>
-                  <a:defRPr sz="1400">
-                    <a:solidFill>
-                      <a:schemeClr val="lt1"/>
-                    </a:solidFill>
-                  </a:defRPr>
-                </a:lvl6pPr>
-                <a:lvl7pPr marL="758825" indent="-177800">
-                  <a:lnSpc>
-                    <a:spcPct val="100000"/>
-                  </a:lnSpc>
-                  <a:spcBef>
-                    <a:spcPts val="500"/>
-                  </a:spcBef>
-                  <a:buFont typeface="Arial" panose="020B0604020202020204" pitchFamily="34" charset="0"/>
-                  <a:buChar char="•"/>
-                  <a:tabLst/>
-                  <a:defRPr sz="1400">
-                    <a:solidFill>
-                      <a:schemeClr val="lt1"/>
-                    </a:solidFill>
-                  </a:defRPr>
-                </a:lvl7pPr>
-                <a:lvl8pPr marL="758825" indent="-177800">
-                  <a:lnSpc>
-                    <a:spcPct val="100000"/>
-                  </a:lnSpc>
-                  <a:spcBef>
-                    <a:spcPts val="500"/>
-                  </a:spcBef>
-                  <a:buFont typeface="Arial" panose="020B0604020202020204" pitchFamily="34" charset="0"/>
-                  <a:buChar char="•"/>
-                  <a:tabLst/>
-                  <a:defRPr sz="1400">
-                    <a:solidFill>
-                      <a:schemeClr val="lt1"/>
-                    </a:solidFill>
-                  </a:defRPr>
-                </a:lvl8pPr>
-                <a:lvl9pPr marL="581025" indent="0">
-                  <a:lnSpc>
-                    <a:spcPct val="100000"/>
-                  </a:lnSpc>
-                  <a:spcBef>
-                    <a:spcPts val="500"/>
-                  </a:spcBef>
-                  <a:buFont typeface="Arial" panose="020B0604020202020204" pitchFamily="34" charset="0"/>
-                  <a:buNone/>
-                  <a:tabLst/>
-                  <a:defRPr sz="1400">
-                    <a:solidFill>
-                      <a:schemeClr val="lt1"/>
-                    </a:solidFill>
-                  </a:defRPr>
-                </a:lvl9pPr>
-              </a:lstStyle>
-              <a:p>
-                <a:pPr marL="0" marR="0" lvl="0" indent="0" algn="l" defTabSz="914400" rtl="0" eaLnBrk="1" fontAlgn="auto" latinLnBrk="0" hangingPunct="1">
-                  <a:lnSpc>
-                    <a:spcPct val="100000"/>
-                  </a:lnSpc>
-                  <a:spcBef>
-                    <a:spcPts val="1000"/>
-                  </a:spcBef>
-                  <a:spcAft>
-                    <a:spcPts val="0"/>
-                  </a:spcAft>
-                  <a:buClrTx/>
-                  <a:buSzTx/>
-                  <a:buFont typeface="Arial" panose="020B0604020202020204" pitchFamily="34" charset="0"/>
-                  <a:buNone/>
-                  <a:tabLst/>
-                  <a:defRPr/>
-                </a:pPr>
-                <a:r>
-                  <a:rPr kumimoji="0" lang="en-US" sz="1400" b="1" i="0" u="none" strike="noStrike" kern="1200" cap="none" spc="0" normalizeH="0" baseline="0" noProof="0" dirty="0">
-                    <a:ln>
-                      <a:noFill/>
-                    </a:ln>
-                    <a:solidFill>
-                      <a:schemeClr val="tx2"/>
-                    </a:solidFill>
-                    <a:effectLst/>
-                    <a:uLnTx/>
-                    <a:uFillTx/>
-                    <a:latin typeface="Spectrum Sans Bold" panose="02110004020202020204"/>
-                    <a:ea typeface="+mn-ea"/>
-                    <a:cs typeface="+mn-cs"/>
-                  </a:rPr>
-                  <a:t>Key Dates</a:t>
-                </a:r>
-              </a:p>
-            </p:txBody>
-          </p:sp>
-        </p:grpSp>
-        <p:grpSp>
-          <p:nvGrpSpPr>
-            <p:cNvPr id="6" name="Group 5">
-              <a:extLst>
-                <a:ext uri="{FF2B5EF4-FFF2-40B4-BE49-F238E27FC236}">
-                  <a16:creationId xmlns:a16="http://schemas.microsoft.com/office/drawing/2014/main" id="{DC921DF1-8B84-1B0C-B80D-3103D04B8E5B}"/>
-                </a:ext>
-              </a:extLst>
-            </p:cNvPr>
-            <p:cNvGrpSpPr/>
-            <p:nvPr/>
-          </p:nvGrpSpPr>
-          <p:grpSpPr>
-            <a:xfrm>
-              <a:off x="8228290" y="339498"/>
-              <a:ext cx="3657600" cy="1852235"/>
-              <a:chOff x="8246762" y="339498"/>
-              <a:chExt cx="3657600" cy="1852235"/>
-            </a:xfrm>
-          </p:grpSpPr>
-          <p:sp>
-            <p:nvSpPr>
-              <p:cNvPr id="7" name="Text Placeholder 5">
-                <a:extLst>
-                  <a:ext uri="{FF2B5EF4-FFF2-40B4-BE49-F238E27FC236}">
-                    <a16:creationId xmlns:a16="http://schemas.microsoft.com/office/drawing/2014/main" id="{15883762-076C-1E30-A144-F7CB60D15B45}"/>
-                  </a:ext>
-                </a:extLst>
-              </p:cNvPr>
-              <p:cNvSpPr txBox="1">
-                <a:spLocks/>
-              </p:cNvSpPr>
-              <p:nvPr/>
-            </p:nvSpPr>
-            <p:spPr>
-              <a:xfrm>
-                <a:off x="8246762" y="545813"/>
-                <a:ext cx="3657600" cy="1645920"/>
-              </a:xfrm>
-              <a:prstGeom prst="roundRect">
-                <a:avLst>
-                  <a:gd name="adj" fmla="val 5698"/>
-                </a:avLst>
-              </a:prstGeom>
-              <a:solidFill>
-                <a:schemeClr val="bg2"/>
-              </a:solidFill>
-              <a:ln w="19050" cap="flat" cmpd="sng" algn="ctr">
-                <a:gradFill flip="none" rotWithShape="1">
-                  <a:gsLst>
-                    <a:gs pos="0">
-                      <a:schemeClr val="accent1"/>
-                    </a:gs>
-                    <a:gs pos="100000">
-                      <a:schemeClr val="accent2"/>
-                    </a:gs>
-                  </a:gsLst>
-                  <a:lin ang="0" scaled="1"/>
-                  <a:tileRect/>
-                </a:gradFill>
-                <a:prstDash val="solid"/>
-                <a:miter lim="800000"/>
-              </a:ln>
-              <a:effectLst>
-                <a:outerShdw blurRad="288898" sx="102000" sy="102000" algn="ctr" rotWithShape="0">
-                  <a:schemeClr val="accent1">
-                    <a:alpha val="18227"/>
-                  </a:schemeClr>
-                </a:outerShdw>
-              </a:effectLst>
-            </p:spPr>
-            <p:txBody>
-              <a:bodyPr vert="horz" lIns="274320" tIns="182880" rIns="0" bIns="182880" rtlCol="0" anchor="t">
-                <a:noAutofit/>
-              </a:bodyPr>
-              <a:lstStyle>
-                <a:defPPr>
-                  <a:defRPr lang="en-US"/>
-                </a:defPPr>
-                <a:lvl1pPr indent="0">
-                  <a:lnSpc>
-                    <a:spcPct val="100000"/>
-                  </a:lnSpc>
-                  <a:spcBef>
-                    <a:spcPts val="1000"/>
-                  </a:spcBef>
-                  <a:buFont typeface="Arial" panose="020B0604020202020204" pitchFamily="34" charset="0"/>
-                  <a:buNone/>
-                  <a:defRPr sz="1400" b="0" i="0"/>
-                </a:lvl1pPr>
-                <a:lvl2pPr marL="225425" indent="-214313">
-                  <a:lnSpc>
-                    <a:spcPct val="100000"/>
-                  </a:lnSpc>
-                  <a:spcBef>
-                    <a:spcPts val="500"/>
-                  </a:spcBef>
-                  <a:buFont typeface="Arial" panose="020B0604020202020204" pitchFamily="34" charset="0"/>
-                  <a:buChar char="•"/>
-                  <a:tabLst/>
-                  <a:defRPr sz="1600" b="0" i="0">
-                    <a:solidFill>
-                      <a:schemeClr val="lt1"/>
-                    </a:solidFill>
-                  </a:defRPr>
-                </a:lvl2pPr>
-                <a:lvl3pPr marL="403225" indent="-177800">
-                  <a:lnSpc>
-                    <a:spcPct val="100000"/>
-                  </a:lnSpc>
-                  <a:spcBef>
-                    <a:spcPts val="500"/>
-                  </a:spcBef>
-                  <a:buFont typeface="Arial" panose="020B0604020202020204" pitchFamily="34" charset="0"/>
-                  <a:buChar char="•"/>
-                  <a:tabLst/>
-                  <a:defRPr sz="1400" b="0" i="0">
-                    <a:solidFill>
-                      <a:schemeClr val="lt1"/>
-                    </a:solidFill>
-                  </a:defRPr>
-                </a:lvl3pPr>
-                <a:lvl4pPr marL="581025" indent="-177800">
-                  <a:lnSpc>
-                    <a:spcPct val="100000"/>
-                  </a:lnSpc>
-                  <a:spcBef>
-                    <a:spcPts val="500"/>
-                  </a:spcBef>
-                  <a:buFont typeface="Arial" panose="020B0604020202020204" pitchFamily="34" charset="0"/>
-                  <a:buChar char="•"/>
-                  <a:tabLst/>
-                  <a:defRPr sz="1200" b="0" i="0">
-                    <a:solidFill>
-                      <a:schemeClr val="lt1"/>
-                    </a:solidFill>
-                  </a:defRPr>
-                </a:lvl4pPr>
-                <a:lvl5pPr marL="758825" indent="-177800">
-                  <a:lnSpc>
-                    <a:spcPct val="100000"/>
-                  </a:lnSpc>
-                  <a:spcBef>
-                    <a:spcPts val="500"/>
-                  </a:spcBef>
-                  <a:buFont typeface="Arial" panose="020B0604020202020204" pitchFamily="34" charset="0"/>
-                  <a:buChar char="•"/>
-                  <a:tabLst/>
-                  <a:defRPr sz="1200" b="0" i="0">
-                    <a:solidFill>
-                      <a:schemeClr val="lt1"/>
-                    </a:solidFill>
-                  </a:defRPr>
-                </a:lvl5pPr>
-                <a:lvl6pPr marL="758825" indent="-177800">
-                  <a:lnSpc>
-                    <a:spcPct val="100000"/>
-                  </a:lnSpc>
-                  <a:spcBef>
-                    <a:spcPts val="500"/>
-                  </a:spcBef>
-                  <a:buFont typeface="Arial" panose="020B0604020202020204" pitchFamily="34" charset="0"/>
-                  <a:buChar char="•"/>
-                  <a:tabLst/>
-                  <a:defRPr sz="1400">
-                    <a:solidFill>
-                      <a:schemeClr val="lt1"/>
-                    </a:solidFill>
-                  </a:defRPr>
-                </a:lvl6pPr>
-                <a:lvl7pPr marL="758825" indent="-177800">
-                  <a:lnSpc>
-                    <a:spcPct val="100000"/>
-                  </a:lnSpc>
-                  <a:spcBef>
-                    <a:spcPts val="500"/>
-                  </a:spcBef>
-                  <a:buFont typeface="Arial" panose="020B0604020202020204" pitchFamily="34" charset="0"/>
-                  <a:buChar char="•"/>
-                  <a:tabLst/>
-                  <a:defRPr sz="1400">
-                    <a:solidFill>
-                      <a:schemeClr val="lt1"/>
-                    </a:solidFill>
-                  </a:defRPr>
-                </a:lvl7pPr>
-                <a:lvl8pPr marL="758825" indent="-177800">
-                  <a:lnSpc>
-                    <a:spcPct val="100000"/>
-                  </a:lnSpc>
-                  <a:spcBef>
-                    <a:spcPts val="500"/>
-                  </a:spcBef>
-                  <a:buFont typeface="Arial" panose="020B0604020202020204" pitchFamily="34" charset="0"/>
-                  <a:buChar char="•"/>
-                  <a:tabLst/>
-                  <a:defRPr sz="1400">
-                    <a:solidFill>
-                      <a:schemeClr val="lt1"/>
-                    </a:solidFill>
-                  </a:defRPr>
-                </a:lvl8pPr>
-                <a:lvl9pPr marL="581025" indent="0">
-                  <a:lnSpc>
-                    <a:spcPct val="100000"/>
-                  </a:lnSpc>
-                  <a:spcBef>
-                    <a:spcPts val="500"/>
-                  </a:spcBef>
-                  <a:buFont typeface="Arial" panose="020B0604020202020204" pitchFamily="34" charset="0"/>
-                  <a:buNone/>
-                  <a:tabLst/>
-                  <a:defRPr sz="1400">
-                    <a:solidFill>
-                      <a:schemeClr val="lt1"/>
-                    </a:solidFill>
-                  </a:defRPr>
-                </a:lvl9pPr>
-              </a:lstStyle>
-              <a:p>
-                <a:pPr marL="0" marR="0" lvl="0" indent="0" algn="l" defTabSz="914400" rtl="0" eaLnBrk="1" fontAlgn="auto" latinLnBrk="0" hangingPunct="1">
-                  <a:lnSpc>
-                    <a:spcPct val="100000"/>
-                  </a:lnSpc>
-                  <a:spcBef>
-                    <a:spcPts val="1000"/>
-                  </a:spcBef>
-                  <a:spcAft>
-                    <a:spcPts val="0"/>
-                  </a:spcAft>
-                  <a:buClrTx/>
-                  <a:buSzTx/>
-                  <a:buFont typeface="Arial" panose="020B0604020202020204" pitchFamily="34" charset="0"/>
-                  <a:buNone/>
-                  <a:tabLst/>
-                  <a:defRPr/>
-                </a:pPr>
-                <a:r>
-                  <a:rPr kumimoji="0" lang="en-US" sz="1400" b="0" i="0" u="none" strike="noStrike" kern="1200" cap="none" spc="0" normalizeH="0" baseline="0" noProof="0" dirty="0">
-                    <a:ln>
-                      <a:noFill/>
-                    </a:ln>
-                    <a:solidFill>
-                      <a:srgbClr val="FFFFFF"/>
-                    </a:solidFill>
-                    <a:effectLst/>
-                    <a:uLnTx/>
-                    <a:uFillTx/>
-                    <a:latin typeface="Spectrum Sans Book" panose="02110004020202020204"/>
-                    <a:ea typeface="+mn-ea"/>
-                    <a:cs typeface="+mn-cs"/>
-                  </a:rPr>
-                  <a:t> </a:t>
-                </a:r>
-              </a:p>
-            </p:txBody>
-          </p:sp>
-          <p:sp>
-            <p:nvSpPr>
-              <p:cNvPr id="8" name="Text Placeholder 5">
-                <a:extLst>
-                  <a:ext uri="{FF2B5EF4-FFF2-40B4-BE49-F238E27FC236}">
-                    <a16:creationId xmlns:a16="http://schemas.microsoft.com/office/drawing/2014/main" id="{71088375-E3AE-9335-F358-A5011F8F0FBE}"/>
-                  </a:ext>
-                </a:extLst>
-              </p:cNvPr>
-              <p:cNvSpPr txBox="1">
-                <a:spLocks/>
-              </p:cNvSpPr>
-              <p:nvPr/>
-            </p:nvSpPr>
-            <p:spPr>
-              <a:xfrm>
-                <a:off x="8246762" y="339498"/>
-                <a:ext cx="2468880" cy="413209"/>
-              </a:xfrm>
-              <a:prstGeom prst="roundRect">
-                <a:avLst>
-                  <a:gd name="adj" fmla="val 19110"/>
-                </a:avLst>
-              </a:prstGeom>
-              <a:solidFill>
-                <a:schemeClr val="bg2"/>
-              </a:solidFill>
-              <a:ln w="19050" cap="flat" cmpd="sng" algn="ctr">
-                <a:gradFill flip="none" rotWithShape="1">
-                  <a:gsLst>
-                    <a:gs pos="0">
-                      <a:schemeClr val="accent1"/>
-                    </a:gs>
-                    <a:gs pos="100000">
-                      <a:schemeClr val="accent2"/>
-                    </a:gs>
-                  </a:gsLst>
-                  <a:lin ang="0" scaled="1"/>
-                  <a:tileRect/>
-                </a:gradFill>
-                <a:prstDash val="solid"/>
-                <a:miter lim="800000"/>
-              </a:ln>
-              <a:effectLst>
-                <a:outerShdw blurRad="288898" sx="102000" sy="102000" algn="ctr" rotWithShape="0">
-                  <a:schemeClr val="accent1">
-                    <a:alpha val="18227"/>
-                  </a:schemeClr>
-                </a:outerShdw>
-              </a:effectLst>
-            </p:spPr>
-            <p:txBody>
-              <a:bodyPr vert="horz" lIns="274320" tIns="0" rIns="0" bIns="0" rtlCol="0" anchor="ctr">
-                <a:noAutofit/>
-              </a:bodyPr>
-              <a:lstStyle>
-                <a:defPPr>
-                  <a:defRPr lang="en-US"/>
-                </a:defPPr>
-                <a:lvl1pPr indent="0">
-                  <a:lnSpc>
-                    <a:spcPct val="100000"/>
-                  </a:lnSpc>
-                  <a:spcBef>
-                    <a:spcPts val="1000"/>
-                  </a:spcBef>
-                  <a:buFont typeface="Arial" panose="020B0604020202020204" pitchFamily="34" charset="0"/>
-                  <a:buNone/>
-                  <a:defRPr sz="1400" b="0" i="0"/>
-                </a:lvl1pPr>
-                <a:lvl2pPr marL="225425" indent="-214313">
-                  <a:lnSpc>
-                    <a:spcPct val="100000"/>
-                  </a:lnSpc>
-                  <a:spcBef>
-                    <a:spcPts val="500"/>
-                  </a:spcBef>
-                  <a:buFont typeface="Arial" panose="020B0604020202020204" pitchFamily="34" charset="0"/>
-                  <a:buChar char="•"/>
-                  <a:tabLst/>
-                  <a:defRPr sz="1600" b="0" i="0">
-                    <a:solidFill>
-                      <a:schemeClr val="lt1"/>
-                    </a:solidFill>
-                  </a:defRPr>
-                </a:lvl2pPr>
-                <a:lvl3pPr marL="403225" indent="-177800">
-                  <a:lnSpc>
-                    <a:spcPct val="100000"/>
-                  </a:lnSpc>
-                  <a:spcBef>
-                    <a:spcPts val="500"/>
-                  </a:spcBef>
-                  <a:buFont typeface="Arial" panose="020B0604020202020204" pitchFamily="34" charset="0"/>
-                  <a:buChar char="•"/>
-                  <a:tabLst/>
-                  <a:defRPr sz="1400" b="0" i="0">
-                    <a:solidFill>
-                      <a:schemeClr val="lt1"/>
-                    </a:solidFill>
-                  </a:defRPr>
-                </a:lvl3pPr>
-                <a:lvl4pPr marL="581025" indent="-177800">
-                  <a:lnSpc>
-                    <a:spcPct val="100000"/>
-                  </a:lnSpc>
-                  <a:spcBef>
-                    <a:spcPts val="500"/>
-                  </a:spcBef>
-                  <a:buFont typeface="Arial" panose="020B0604020202020204" pitchFamily="34" charset="0"/>
-                  <a:buChar char="•"/>
-                  <a:tabLst/>
-                  <a:defRPr sz="1200" b="0" i="0">
-                    <a:solidFill>
-                      <a:schemeClr val="lt1"/>
-                    </a:solidFill>
-                  </a:defRPr>
-                </a:lvl4pPr>
-                <a:lvl5pPr marL="758825" indent="-177800">
-                  <a:lnSpc>
-                    <a:spcPct val="100000"/>
-                  </a:lnSpc>
-                  <a:spcBef>
-                    <a:spcPts val="500"/>
-                  </a:spcBef>
-                  <a:buFont typeface="Arial" panose="020B0604020202020204" pitchFamily="34" charset="0"/>
-                  <a:buChar char="•"/>
-                  <a:tabLst/>
-                  <a:defRPr sz="1200" b="0" i="0">
-                    <a:solidFill>
-                      <a:schemeClr val="lt1"/>
-                    </a:solidFill>
-                  </a:defRPr>
-                </a:lvl5pPr>
-                <a:lvl6pPr marL="758825" indent="-177800">
-                  <a:lnSpc>
-                    <a:spcPct val="100000"/>
-                  </a:lnSpc>
-                  <a:spcBef>
-                    <a:spcPts val="500"/>
-                  </a:spcBef>
-                  <a:buFont typeface="Arial" panose="020B0604020202020204" pitchFamily="34" charset="0"/>
-                  <a:buChar char="•"/>
-                  <a:tabLst/>
-                  <a:defRPr sz="1400">
-                    <a:solidFill>
-                      <a:schemeClr val="lt1"/>
-                    </a:solidFill>
-                  </a:defRPr>
-                </a:lvl6pPr>
-                <a:lvl7pPr marL="758825" indent="-177800">
-                  <a:lnSpc>
-                    <a:spcPct val="100000"/>
-                  </a:lnSpc>
-                  <a:spcBef>
-                    <a:spcPts val="500"/>
-                  </a:spcBef>
-                  <a:buFont typeface="Arial" panose="020B0604020202020204" pitchFamily="34" charset="0"/>
-                  <a:buChar char="•"/>
-                  <a:tabLst/>
-                  <a:defRPr sz="1400">
-                    <a:solidFill>
-                      <a:schemeClr val="lt1"/>
-                    </a:solidFill>
-                  </a:defRPr>
-                </a:lvl7pPr>
-                <a:lvl8pPr marL="758825" indent="-177800">
-                  <a:lnSpc>
-                    <a:spcPct val="100000"/>
-                  </a:lnSpc>
-                  <a:spcBef>
-                    <a:spcPts val="500"/>
-                  </a:spcBef>
-                  <a:buFont typeface="Arial" panose="020B0604020202020204" pitchFamily="34" charset="0"/>
-                  <a:buChar char="•"/>
-                  <a:tabLst/>
-                  <a:defRPr sz="1400">
-                    <a:solidFill>
-                      <a:schemeClr val="lt1"/>
-                    </a:solidFill>
-                  </a:defRPr>
-                </a:lvl8pPr>
-                <a:lvl9pPr marL="581025" indent="0">
-                  <a:lnSpc>
-                    <a:spcPct val="100000"/>
-                  </a:lnSpc>
-                  <a:spcBef>
-                    <a:spcPts val="500"/>
-                  </a:spcBef>
-                  <a:buFont typeface="Arial" panose="020B0604020202020204" pitchFamily="34" charset="0"/>
-                  <a:buNone/>
-                  <a:tabLst/>
-                  <a:defRPr sz="1400">
-                    <a:solidFill>
-                      <a:schemeClr val="lt1"/>
-                    </a:solidFill>
-                  </a:defRPr>
-                </a:lvl9pPr>
-              </a:lstStyle>
-              <a:p>
-                <a:pPr marL="0" marR="0" lvl="0" indent="0" algn="l" defTabSz="914400" rtl="0" eaLnBrk="1" fontAlgn="auto" latinLnBrk="0" hangingPunct="1">
-                  <a:lnSpc>
-                    <a:spcPct val="100000"/>
-                  </a:lnSpc>
-                  <a:spcBef>
-                    <a:spcPts val="1000"/>
-                  </a:spcBef>
-                  <a:spcAft>
-                    <a:spcPts val="0"/>
-                  </a:spcAft>
-                  <a:buClrTx/>
-                  <a:buSzTx/>
-                  <a:buFont typeface="Arial" panose="020B0604020202020204" pitchFamily="34" charset="0"/>
-                  <a:buNone/>
-                  <a:tabLst/>
-                  <a:defRPr/>
-                </a:pPr>
-                <a:r>
-                  <a:rPr kumimoji="0" lang="en-US" sz="1400" b="1" i="0" u="none" strike="noStrike" kern="1200" cap="none" spc="0" normalizeH="0" baseline="0" noProof="0" dirty="0">
-                    <a:ln>
-                      <a:noFill/>
-                    </a:ln>
-                    <a:solidFill>
-                      <a:schemeClr val="tx2"/>
-                    </a:solidFill>
-                    <a:effectLst/>
-                    <a:uLnTx/>
-                    <a:uFillTx/>
-                    <a:latin typeface="Spectrum Sans Bold" panose="02110004020202020204"/>
-                    <a:ea typeface="+mn-ea"/>
-                    <a:cs typeface="+mn-cs"/>
-                  </a:rPr>
-                  <a:t>Networks</a:t>
-                </a:r>
-              </a:p>
-            </p:txBody>
-          </p:sp>
-        </p:grpSp>
-      </p:grpSp>
-      <p:sp>
-        <p:nvSpPr>
-          <p:cNvPr id="17" name="Text Placeholder 5">
-            <a:extLst>
-              <a:ext uri="{FF2B5EF4-FFF2-40B4-BE49-F238E27FC236}">
-                <a16:creationId xmlns:a16="http://schemas.microsoft.com/office/drawing/2014/main" id="{BD525717-4734-AD68-629D-4801BA3F56D5}"/>
-              </a:ext>
-            </a:extLst>
-          </p:cNvPr>
-          <p:cNvSpPr txBox="1">
-            <a:spLocks/>
-          </p:cNvSpPr>
-          <p:nvPr userDrawn="1"/>
-        </p:nvSpPr>
-        <p:spPr>
-          <a:xfrm>
-            <a:off x="304800" y="2727540"/>
-            <a:ext cx="11581090" cy="3458327"/>
-          </a:xfrm>
-          <a:prstGeom prst="roundRect">
-            <a:avLst>
-              <a:gd name="adj" fmla="val 5698"/>
-            </a:avLst>
-          </a:prstGeom>
-          <a:solidFill>
-            <a:schemeClr val="bg2"/>
-          </a:solidFill>
-          <a:ln w="19050" cap="flat" cmpd="sng" algn="ctr">
-            <a:gradFill flip="none" rotWithShape="1">
-              <a:gsLst>
-                <a:gs pos="0">
-                  <a:schemeClr val="accent1"/>
-                </a:gs>
-                <a:gs pos="100000">
-                  <a:schemeClr val="accent2"/>
-                </a:gs>
-              </a:gsLst>
-              <a:lin ang="0" scaled="1"/>
-              <a:tileRect/>
-            </a:gradFill>
-            <a:prstDash val="solid"/>
-            <a:miter lim="800000"/>
-          </a:ln>
-          <a:effectLst>
-            <a:outerShdw blurRad="288898" sx="102000" sy="102000" algn="ctr" rotWithShape="0">
-              <a:schemeClr val="accent1">
-                <a:alpha val="18227"/>
-              </a:schemeClr>
-            </a:outerShdw>
-          </a:effectLst>
-        </p:spPr>
-        <p:txBody>
-          <a:bodyPr vert="horz" lIns="274320" tIns="365760" rIns="0" bIns="182880" rtlCol="0" anchor="t">
-            <a:noAutofit/>
-          </a:bodyPr>
-          <a:lstStyle>
-            <a:defPPr>
-              <a:defRPr lang="en-US"/>
-            </a:defPPr>
-            <a:lvl1pPr indent="0">
-              <a:lnSpc>
-                <a:spcPct val="100000"/>
-              </a:lnSpc>
-              <a:spcBef>
-                <a:spcPts val="1000"/>
-              </a:spcBef>
-              <a:buFont typeface="Arial" panose="020B0604020202020204" pitchFamily="34" charset="0"/>
-              <a:buNone/>
-              <a:defRPr sz="1400" b="0" i="0"/>
-            </a:lvl1pPr>
-            <a:lvl2pPr marL="225425" indent="-214313">
-              <a:lnSpc>
-                <a:spcPct val="100000"/>
-              </a:lnSpc>
-              <a:spcBef>
-                <a:spcPts val="500"/>
-              </a:spcBef>
-              <a:buFont typeface="Arial" panose="020B0604020202020204" pitchFamily="34" charset="0"/>
-              <a:buChar char="•"/>
-              <a:tabLst/>
-              <a:defRPr sz="1600" b="0" i="0">
-                <a:solidFill>
-                  <a:schemeClr val="lt1"/>
-                </a:solidFill>
-              </a:defRPr>
-            </a:lvl2pPr>
-            <a:lvl3pPr marL="403225" indent="-177800">
-              <a:lnSpc>
-                <a:spcPct val="100000"/>
-              </a:lnSpc>
-              <a:spcBef>
-                <a:spcPts val="500"/>
-              </a:spcBef>
-              <a:buFont typeface="Arial" panose="020B0604020202020204" pitchFamily="34" charset="0"/>
-              <a:buChar char="•"/>
-              <a:tabLst/>
-              <a:defRPr sz="1400" b="0" i="0">
-                <a:solidFill>
-                  <a:schemeClr val="lt1"/>
-                </a:solidFill>
-              </a:defRPr>
-            </a:lvl3pPr>
-            <a:lvl4pPr marL="581025" indent="-177800">
-              <a:lnSpc>
-                <a:spcPct val="100000"/>
-              </a:lnSpc>
-              <a:spcBef>
-                <a:spcPts val="500"/>
-              </a:spcBef>
-              <a:buFont typeface="Arial" panose="020B0604020202020204" pitchFamily="34" charset="0"/>
-              <a:buChar char="•"/>
-              <a:tabLst/>
-              <a:defRPr sz="1200" b="0" i="0">
-                <a:solidFill>
-                  <a:schemeClr val="lt1"/>
-                </a:solidFill>
-              </a:defRPr>
-            </a:lvl4pPr>
-            <a:lvl5pPr marL="758825" indent="-177800">
-              <a:lnSpc>
-                <a:spcPct val="100000"/>
-              </a:lnSpc>
-              <a:spcBef>
-                <a:spcPts val="500"/>
-              </a:spcBef>
-              <a:buFont typeface="Arial" panose="020B0604020202020204" pitchFamily="34" charset="0"/>
-              <a:buChar char="•"/>
-              <a:tabLst/>
-              <a:defRPr sz="1200" b="0" i="0">
-                <a:solidFill>
-                  <a:schemeClr val="lt1"/>
-                </a:solidFill>
-              </a:defRPr>
-            </a:lvl5pPr>
-            <a:lvl6pPr marL="758825" indent="-177800">
-              <a:lnSpc>
-                <a:spcPct val="100000"/>
-              </a:lnSpc>
-              <a:spcBef>
-                <a:spcPts val="500"/>
-              </a:spcBef>
-              <a:buFont typeface="Arial" panose="020B0604020202020204" pitchFamily="34" charset="0"/>
-              <a:buChar char="•"/>
-              <a:tabLst/>
-              <a:defRPr sz="1400">
-                <a:solidFill>
-                  <a:schemeClr val="lt1"/>
-                </a:solidFill>
-              </a:defRPr>
-            </a:lvl6pPr>
-            <a:lvl7pPr marL="758825" indent="-177800">
-              <a:lnSpc>
-                <a:spcPct val="100000"/>
-              </a:lnSpc>
-              <a:spcBef>
-                <a:spcPts val="500"/>
-              </a:spcBef>
-              <a:buFont typeface="Arial" panose="020B0604020202020204" pitchFamily="34" charset="0"/>
-              <a:buChar char="•"/>
-              <a:tabLst/>
-              <a:defRPr sz="1400">
-                <a:solidFill>
-                  <a:schemeClr val="lt1"/>
-                </a:solidFill>
-              </a:defRPr>
-            </a:lvl7pPr>
-            <a:lvl8pPr marL="758825" indent="-177800">
-              <a:lnSpc>
-                <a:spcPct val="100000"/>
-              </a:lnSpc>
-              <a:spcBef>
-                <a:spcPts val="500"/>
-              </a:spcBef>
-              <a:buFont typeface="Arial" panose="020B0604020202020204" pitchFamily="34" charset="0"/>
-              <a:buChar char="•"/>
-              <a:tabLst/>
-              <a:defRPr sz="1400">
-                <a:solidFill>
-                  <a:schemeClr val="lt1"/>
-                </a:solidFill>
-              </a:defRPr>
-            </a:lvl8pPr>
-            <a:lvl9pPr marL="581025" indent="0">
-              <a:lnSpc>
-                <a:spcPct val="100000"/>
-              </a:lnSpc>
-              <a:spcBef>
-                <a:spcPts val="500"/>
-              </a:spcBef>
-              <a:buFont typeface="Arial" panose="020B0604020202020204" pitchFamily="34" charset="0"/>
-              <a:buNone/>
-              <a:tabLst/>
-              <a:defRPr sz="1400">
-                <a:solidFill>
-                  <a:schemeClr val="lt1"/>
-                </a:solidFill>
-              </a:defRPr>
-            </a:lvl9pPr>
-          </a:lstStyle>
-          <a:p>
-            <a:endParaRPr lang="en-US" b="1" dirty="0"/>
-          </a:p>
-        </p:txBody>
-      </p:sp>
-      <p:sp>
-        <p:nvSpPr>
-          <p:cNvPr id="18" name="Text Placeholder 5">
-            <a:extLst>
-              <a:ext uri="{FF2B5EF4-FFF2-40B4-BE49-F238E27FC236}">
-                <a16:creationId xmlns:a16="http://schemas.microsoft.com/office/drawing/2014/main" id="{F51643C2-EABE-E551-018B-251B08C770BB}"/>
-              </a:ext>
-            </a:extLst>
-          </p:cNvPr>
-          <p:cNvSpPr txBox="1">
-            <a:spLocks/>
-          </p:cNvSpPr>
-          <p:nvPr userDrawn="1"/>
-        </p:nvSpPr>
-        <p:spPr>
-          <a:xfrm>
-            <a:off x="303388" y="2524343"/>
-            <a:ext cx="2469447" cy="413209"/>
-          </a:xfrm>
-          <a:prstGeom prst="roundRect">
-            <a:avLst>
-              <a:gd name="adj" fmla="val 19110"/>
-            </a:avLst>
-          </a:prstGeom>
-          <a:solidFill>
-            <a:schemeClr val="bg2"/>
-          </a:solidFill>
-          <a:ln w="19050" cap="flat" cmpd="sng" algn="ctr">
-            <a:gradFill flip="none" rotWithShape="1">
-              <a:gsLst>
-                <a:gs pos="0">
-                  <a:schemeClr val="accent1"/>
-                </a:gs>
-                <a:gs pos="100000">
-                  <a:schemeClr val="accent2"/>
-                </a:gs>
-              </a:gsLst>
-              <a:lin ang="0" scaled="1"/>
-              <a:tileRect/>
-            </a:gradFill>
-            <a:prstDash val="solid"/>
-            <a:miter lim="800000"/>
-          </a:ln>
-          <a:effectLst>
-            <a:outerShdw blurRad="288898" sx="102000" sy="102000" algn="ctr" rotWithShape="0">
-              <a:schemeClr val="accent1">
-                <a:alpha val="18227"/>
-              </a:schemeClr>
-            </a:outerShdw>
-          </a:effectLst>
-        </p:spPr>
-        <p:txBody>
-          <a:bodyPr vert="horz" lIns="274320" tIns="0" rIns="0" bIns="0" rtlCol="0" anchor="ctr">
-            <a:noAutofit/>
-          </a:bodyPr>
-          <a:lstStyle>
-            <a:defPPr>
-              <a:defRPr lang="en-US"/>
-            </a:defPPr>
-            <a:lvl1pPr indent="0">
-              <a:lnSpc>
-                <a:spcPct val="100000"/>
-              </a:lnSpc>
-              <a:spcBef>
-                <a:spcPts val="1000"/>
-              </a:spcBef>
-              <a:buFont typeface="Arial" panose="020B0604020202020204" pitchFamily="34" charset="0"/>
-              <a:buNone/>
-              <a:defRPr sz="1400" b="0" i="0"/>
-            </a:lvl1pPr>
-            <a:lvl2pPr marL="225425" indent="-214313">
-              <a:lnSpc>
-                <a:spcPct val="100000"/>
-              </a:lnSpc>
-              <a:spcBef>
-                <a:spcPts val="500"/>
-              </a:spcBef>
-              <a:buFont typeface="Arial" panose="020B0604020202020204" pitchFamily="34" charset="0"/>
-              <a:buChar char="•"/>
-              <a:tabLst/>
-              <a:defRPr sz="1600" b="0" i="0">
-                <a:solidFill>
-                  <a:schemeClr val="lt1"/>
-                </a:solidFill>
-              </a:defRPr>
-            </a:lvl2pPr>
-            <a:lvl3pPr marL="403225" indent="-177800">
-              <a:lnSpc>
-                <a:spcPct val="100000"/>
-              </a:lnSpc>
-              <a:spcBef>
-                <a:spcPts val="500"/>
-              </a:spcBef>
-              <a:buFont typeface="Arial" panose="020B0604020202020204" pitchFamily="34" charset="0"/>
-              <a:buChar char="•"/>
-              <a:tabLst/>
-              <a:defRPr sz="1400" b="0" i="0">
-                <a:solidFill>
-                  <a:schemeClr val="lt1"/>
-                </a:solidFill>
-              </a:defRPr>
-            </a:lvl3pPr>
-            <a:lvl4pPr marL="581025" indent="-177800">
-              <a:lnSpc>
-                <a:spcPct val="100000"/>
-              </a:lnSpc>
-              <a:spcBef>
-                <a:spcPts val="500"/>
-              </a:spcBef>
-              <a:buFont typeface="Arial" panose="020B0604020202020204" pitchFamily="34" charset="0"/>
-              <a:buChar char="•"/>
-              <a:tabLst/>
-              <a:defRPr sz="1200" b="0" i="0">
-                <a:solidFill>
-                  <a:schemeClr val="lt1"/>
-                </a:solidFill>
-              </a:defRPr>
-            </a:lvl4pPr>
-            <a:lvl5pPr marL="758825" indent="-177800">
-              <a:lnSpc>
-                <a:spcPct val="100000"/>
-              </a:lnSpc>
-              <a:spcBef>
-                <a:spcPts val="500"/>
-              </a:spcBef>
-              <a:buFont typeface="Arial" panose="020B0604020202020204" pitchFamily="34" charset="0"/>
-              <a:buChar char="•"/>
-              <a:tabLst/>
-              <a:defRPr sz="1200" b="0" i="0">
-                <a:solidFill>
-                  <a:schemeClr val="lt1"/>
-                </a:solidFill>
-              </a:defRPr>
-            </a:lvl5pPr>
-            <a:lvl6pPr marL="758825" indent="-177800">
-              <a:lnSpc>
-                <a:spcPct val="100000"/>
-              </a:lnSpc>
-              <a:spcBef>
-                <a:spcPts val="500"/>
-              </a:spcBef>
-              <a:buFont typeface="Arial" panose="020B0604020202020204" pitchFamily="34" charset="0"/>
-              <a:buChar char="•"/>
-              <a:tabLst/>
-              <a:defRPr sz="1400">
-                <a:solidFill>
-                  <a:schemeClr val="lt1"/>
-                </a:solidFill>
-              </a:defRPr>
-            </a:lvl6pPr>
-            <a:lvl7pPr marL="758825" indent="-177800">
-              <a:lnSpc>
-                <a:spcPct val="100000"/>
-              </a:lnSpc>
-              <a:spcBef>
-                <a:spcPts val="500"/>
-              </a:spcBef>
-              <a:buFont typeface="Arial" panose="020B0604020202020204" pitchFamily="34" charset="0"/>
-              <a:buChar char="•"/>
-              <a:tabLst/>
-              <a:defRPr sz="1400">
-                <a:solidFill>
-                  <a:schemeClr val="lt1"/>
-                </a:solidFill>
-              </a:defRPr>
-            </a:lvl7pPr>
-            <a:lvl8pPr marL="758825" indent="-177800">
-              <a:lnSpc>
-                <a:spcPct val="100000"/>
-              </a:lnSpc>
-              <a:spcBef>
-                <a:spcPts val="500"/>
-              </a:spcBef>
-              <a:buFont typeface="Arial" panose="020B0604020202020204" pitchFamily="34" charset="0"/>
-              <a:buChar char="•"/>
-              <a:tabLst/>
-              <a:defRPr sz="1400">
-                <a:solidFill>
-                  <a:schemeClr val="lt1"/>
-                </a:solidFill>
-              </a:defRPr>
-            </a:lvl8pPr>
-            <a:lvl9pPr marL="581025" indent="0">
-              <a:lnSpc>
-                <a:spcPct val="100000"/>
-              </a:lnSpc>
-              <a:spcBef>
-                <a:spcPts val="500"/>
-              </a:spcBef>
-              <a:buFont typeface="Arial" panose="020B0604020202020204" pitchFamily="34" charset="0"/>
-              <a:buNone/>
-              <a:tabLst/>
-              <a:defRPr sz="1400">
-                <a:solidFill>
-                  <a:schemeClr val="lt1"/>
-                </a:solidFill>
-              </a:defRPr>
-            </a:lvl9pPr>
-          </a:lstStyle>
-          <a:p>
-            <a:r>
-              <a:rPr lang="en-US" b="1" dirty="0">
-                <a:solidFill>
-                  <a:schemeClr val="tx2"/>
-                </a:solidFill>
-                <a:latin typeface="+mj-lt"/>
-              </a:rPr>
-              <a:t>Campaign Summary</a:t>
-            </a:r>
-          </a:p>
-        </p:txBody>
-      </p:sp>
-    </p:spTree>
-    <p:extLst>
-      <p:ext uri="{BB962C8B-B14F-4D97-AF65-F5344CB8AC3E}">
-        <p14:creationId xmlns:p14="http://schemas.microsoft.com/office/powerpoint/2010/main" val="2323666240"/>
-      </p:ext>
-    </p:extLst>
-  </p:cSld>
-  <p:clrMapOvr>
-    <a:masterClrMapping/>
-  </p:clrMapOvr>
-  <p:extLst>
-    <p:ext uri="{DCECCB84-F9BA-43D5-87BE-67443E8EF086}">
-      <p15:sldGuideLst xmlns:p15="http://schemas.microsoft.com/office/powerpoint/2012/main">
-        <p15:guide id="1" pos="192">
-          <p15:clr>
-            <a:srgbClr val="FBAE40"/>
-          </p15:clr>
-        </p15:guide>
-      </p15:sldGuideLst>
-    </p:ext>
-  </p:extLst>
-</p:sldLayout>
-</file>
-
 <file path=ppt/slideMasters/slideMaster1.xml><?xml version="1.0" encoding="utf-8"?>
 <p:sldMaster xmlns:a="http://schemas.openxmlformats.org/drawingml/2006/main" xmlns:r="http://schemas.openxmlformats.org/officeDocument/2006/relationships" xmlns:p="http://schemas.openxmlformats.org/presentationml/2006/main" preserve="1">
   <p:cSld>
@@ -7287,7 +4049,7 @@
           <a:p>
             <a:fld id="{684576CA-1569-584A-A50E-3CEA5FEA6A2C}" type="datetime1">
               <a:rPr lang="en-CA" smtClean="0"/>
-              <a:t>2026-03-10</a:t>
+              <a:t>2026-03-24</a:t>
             </a:fld>
             <a:endParaRPr lang="en-US" dirty="0"/>
           </a:p>
@@ -7956,7 +4718,7 @@
           <a:p>
             <a:fld id="{684576CA-1569-584A-A50E-3CEA5FEA6A2C}" type="datetime1">
               <a:rPr lang="en-CA" smtClean="0"/>
-              <a:t>2026-03-10</a:t>
+              <a:t>2026-03-24</a:t>
             </a:fld>
             <a:endParaRPr lang="en-US"/>
           </a:p>
@@ -8079,7 +4841,7 @@
           <p:nvPr userDrawn="1"/>
         </p:nvPicPr>
         <p:blipFill>
-          <a:blip r:embed="rId3"/>
+          <a:blip r:embed="rId2"/>
           <a:srcRect l="58" r="58"/>
           <a:stretch/>
         </p:blipFill>
@@ -8101,9 +4863,6 @@
     </p:extLst>
   </p:cSld>
   <p:clrMap bg1="lt1" tx1="dk1" bg2="lt2" tx2="dk2" accent1="accent1" accent2="accent2" accent3="accent3" accent4="accent4" accent5="accent5" accent6="accent6" hlink="hlink" folHlink="folHlink"/>
-  <p:sldLayoutIdLst>
-    <p:sldLayoutId id="2147483927" r:id="rId1"/>
-  </p:sldLayoutIdLst>
   <p:hf hdr="0" ftr="0" dt="0"/>
   <p:txStyles>
     <p:titleStyle>
@@ -8632,7 +5391,7 @@
           <a:p>
             <a:fld id="{684576CA-1569-584A-A50E-3CEA5FEA6A2C}" type="datetime1">
               <a:rPr lang="en-CA" smtClean="0"/>
-              <a:t>2026-03-10</a:t>
+              <a:t>2026-03-24</a:t>
             </a:fld>
             <a:endParaRPr lang="en-US" dirty="0"/>
           </a:p>
@@ -9301,7 +6060,7 @@
           <a:p>
             <a:fld id="{684576CA-1569-584A-A50E-3CEA5FEA6A2C}" type="datetime1">
               <a:rPr lang="en-CA" smtClean="0"/>
-              <a:t>2026-03-10</a:t>
+              <a:t>2026-03-24</a:t>
             </a:fld>
             <a:endParaRPr lang="en-US"/>
           </a:p>
@@ -9424,7 +6183,7 @@
           <p:nvPr userDrawn="1"/>
         </p:nvPicPr>
         <p:blipFill>
-          <a:blip r:embed="rId3"/>
+          <a:blip r:embed="rId2"/>
           <a:srcRect l="58" r="58"/>
           <a:stretch/>
         </p:blipFill>
@@ -9446,9 +6205,6 @@
     </p:extLst>
   </p:cSld>
   <p:clrMap bg1="lt1" tx1="dk1" bg2="lt2" tx2="dk2" accent1="accent1" accent2="accent2" accent3="accent3" accent4="accent4" accent5="accent5" accent6="accent6" hlink="hlink" folHlink="folHlink"/>
-  <p:sldLayoutIdLst>
-    <p:sldLayoutId id="2147483931" r:id="rId1"/>
-  </p:sldLayoutIdLst>
   <p:hf hdr="0" ftr="0" dt="0"/>
   <p:txStyles>
     <p:titleStyle>
@@ -9805,7 +6561,7 @@
         <p:cNvPr id="1" name="">
           <a:extLst>
             <a:ext uri="{FF2B5EF4-FFF2-40B4-BE49-F238E27FC236}">
-              <a16:creationId xmlns:a16="http://schemas.microsoft.com/office/drawing/2014/main" id="{9DF3C721-C486-90AC-3213-1B94B50E7782}"/>
+              <a16:creationId xmlns:a16="http://schemas.microsoft.com/office/drawing/2014/main" id="{26D73ECE-848D-F787-E262-68FF5CA019E5}"/>
             </a:ext>
           </a:extLst>
         </p:cNvPr>
@@ -9822,10 +6578,10 @@
       </p:grpSpPr>
       <p:pic>
         <p:nvPicPr>
-          <p:cNvPr id="25" name="Picture 24">
+          <p:cNvPr id="16" name="Picture 15">
             <a:extLst>
               <a:ext uri="{FF2B5EF4-FFF2-40B4-BE49-F238E27FC236}">
-                <a16:creationId xmlns:a16="http://schemas.microsoft.com/office/drawing/2014/main" id="{FBDBF840-7433-BCA3-CB6D-77E96186C77F}"/>
+                <a16:creationId xmlns:a16="http://schemas.microsoft.com/office/drawing/2014/main" id="{FCA5ACC1-8104-1B4A-E39E-E395973DDD25}"/>
               </a:ext>
             </a:extLst>
           </p:cNvPr>
@@ -9842,7 +6598,7 @@
         </p:blipFill>
         <p:spPr>
           <a:xfrm>
-            <a:off x="305401" y="330809"/>
+            <a:off x="308107" y="326626"/>
             <a:ext cx="3529584" cy="1877731"/>
           </a:xfrm>
           <a:prstGeom prst="rect">
@@ -9855,7 +6611,7 @@
           <p:cNvPr id="8" name="Footer Placeholder 1">
             <a:extLst>
               <a:ext uri="{FF2B5EF4-FFF2-40B4-BE49-F238E27FC236}">
-                <a16:creationId xmlns:a16="http://schemas.microsoft.com/office/drawing/2014/main" id="{8604AF90-147A-0AE5-C98D-B5FBE727A961}"/>
+                <a16:creationId xmlns:a16="http://schemas.microsoft.com/office/drawing/2014/main" id="{4A1C9E55-C9D5-013F-E989-6BF57EA7AC7C}"/>
               </a:ext>
             </a:extLst>
           </p:cNvPr>
@@ -10013,7 +6769,7 @@
           <p:cNvPr id="9" name="Text Placeholder 5">
             <a:extLst>
               <a:ext uri="{FF2B5EF4-FFF2-40B4-BE49-F238E27FC236}">
-                <a16:creationId xmlns:a16="http://schemas.microsoft.com/office/drawing/2014/main" id="{2A54B189-26C2-19B8-4C6A-611613235212}"/>
+                <a16:creationId xmlns:a16="http://schemas.microsoft.com/office/drawing/2014/main" id="{B26088D5-D520-A709-13EC-A010675A5AB4}"/>
               </a:ext>
             </a:extLst>
           </p:cNvPr>
@@ -10208,33 +6964,13 @@
             </a:lvl9pPr>
           </a:lstStyle>
           <a:p>
-            <a:pPr marL="0" marR="0" lvl="0" indent="0" algn="l" defTabSz="914400" rtl="0" eaLnBrk="1" fontAlgn="auto" latinLnBrk="0" hangingPunct="1">
-              <a:lnSpc>
-                <a:spcPct val="100000"/>
-              </a:lnSpc>
-              <a:spcBef>
-                <a:spcPts val="1000"/>
-              </a:spcBef>
-              <a:spcAft>
-                <a:spcPts val="0"/>
-              </a:spcAft>
-              <a:buClrTx/>
-              <a:buSzTx/>
-              <a:buFont typeface="Arial" panose="020B0604020202020204" pitchFamily="34" charset="0"/>
-              <a:buNone/>
-              <a:tabLst/>
+            <a:pPr lvl="0">
               <a:defRPr/>
             </a:pPr>
-            <a:endParaRPr lang="en-US" sz="1400" b="0" i="0" u="none" strike="noStrike" kern="1200" cap="none" spc="0" normalizeH="0" baseline="0" noProof="0" dirty="0">
-              <a:ln>
-                <a:noFill/>
-              </a:ln>
+            <a:endParaRPr lang="en-US" b="1" dirty="0">
               <a:solidFill>
                 <a:srgbClr val="D5D5D5"/>
               </a:solidFill>
-              <a:effectLst/>
-              <a:uLnTx/>
-              <a:uFillTx/>
               <a:latin typeface="Spectrum Sans Bold" panose="02110004020202020204"/>
             </a:endParaRPr>
           </a:p>
@@ -10242,10 +6978,10 @@
       </p:sp>
       <p:sp>
         <p:nvSpPr>
-          <p:cNvPr id="3" name="Text Placeholder 5">
+          <p:cNvPr id="2" name="Text Placeholder 5">
             <a:extLst>
               <a:ext uri="{FF2B5EF4-FFF2-40B4-BE49-F238E27FC236}">
-                <a16:creationId xmlns:a16="http://schemas.microsoft.com/office/drawing/2014/main" id="{73F33B82-C90A-7C99-04F2-3A3F8EE7514E}"/>
+                <a16:creationId xmlns:a16="http://schemas.microsoft.com/office/drawing/2014/main" id="{323F01E5-8D5C-B5A5-2608-00C589F549AC}"/>
               </a:ext>
             </a:extLst>
           </p:cNvPr>
@@ -10256,7 +6992,7 @@
         </p:nvSpPr>
         <p:spPr>
           <a:xfrm>
-            <a:off x="4264370" y="694390"/>
+            <a:off x="4358640" y="694390"/>
             <a:ext cx="3474720" cy="1463040"/>
           </a:xfrm>
           <a:prstGeom prst="roundRect">
@@ -10455,39 +7191,6 @@
           <a:p>
             <a:pPr marL="0" marR="0" lvl="0" indent="0" algn="l" defTabSz="91440" rtl="0" eaLnBrk="1" fontAlgn="auto" latinLnBrk="0" hangingPunct="1">
               <a:lnSpc>
-                <a:spcPts val="600"/>
-              </a:lnSpc>
-              <a:spcBef>
-                <a:spcPts val="0"/>
-              </a:spcBef>
-              <a:spcAft>
-                <a:spcPts val="0"/>
-              </a:spcAft>
-              <a:buClrTx/>
-              <a:buSzTx/>
-              <a:buFont typeface="Arial" panose="020B0604020202020204" pitchFamily="34" charset="0"/>
-              <a:buNone/>
-              <a:tabLst/>
-              <a:defRPr/>
-            </a:pPr>
-            <a:endParaRPr kumimoji="0" lang="en-US" sz="1200" b="0" i="0" u="none" strike="noStrike" kern="1200" cap="none" spc="0" normalizeH="0" baseline="0" noProof="0" dirty="0">
-              <a:ln>
-                <a:noFill/>
-              </a:ln>
-              <a:solidFill>
-                <a:srgbClr val="FFFFFF"/>
-              </a:solidFill>
-              <a:effectLst/>
-              <a:uLnTx/>
-              <a:uFillTx/>
-              <a:latin typeface="Spectrum Sans Book" panose="02110004020202020204"/>
-              <a:ea typeface="+mn-ea"/>
-              <a:cs typeface="+mn-cs"/>
-            </a:endParaRPr>
-          </a:p>
-          <a:p>
-            <a:pPr marL="0" marR="0" lvl="0" indent="0" algn="l" defTabSz="91440" rtl="0" eaLnBrk="1" fontAlgn="auto" latinLnBrk="0" hangingPunct="1">
-              <a:lnSpc>
                 <a:spcPts val="1200"/>
               </a:lnSpc>
               <a:spcBef>
@@ -10504,7 +7207,7 @@
               <a:defRPr/>
             </a:pPr>
             <a:r>
-              <a:rPr kumimoji="0" lang="en-US" sz="1200" b="0" i="0" u="none" strike="noStrike" kern="1200" cap="none" spc="0" normalizeH="0" baseline="0" noProof="0" dirty="0">
+              <a:rPr kumimoji="0" lang="en-US" sz="1200" b="1" i="0" u="sng" strike="noStrike" kern="1200" cap="none" spc="0" normalizeH="0" baseline="0" noProof="0" dirty="0">
                 <a:ln>
                   <a:noFill/>
                 </a:ln>
@@ -10518,7 +7221,7 @@
                 <a:ea typeface="+mn-ea"/>
                 <a:cs typeface="+mn-cs"/>
               </a:rPr>
-              <a:t>03/15/26						Selection Sunday</a:t>
+              <a:t>4/81-6/21			      NBA Playoffs</a:t>
             </a:r>
           </a:p>
           <a:p>
@@ -10554,7 +7257,7 @@
                 <a:ea typeface="+mn-ea"/>
                 <a:cs typeface="+mn-cs"/>
               </a:rPr>
-              <a:t>03/17-03/28			Men’s Play-In + Rounds 1-4</a:t>
+              <a:t>04/18-05/17			Rund One + Two</a:t>
             </a:r>
           </a:p>
           <a:p>
@@ -10590,7 +7293,7 @@
                 <a:ea typeface="+mn-ea"/>
                 <a:cs typeface="+mn-cs"/>
               </a:rPr>
-              <a:t>03/18-03/30			Women’s Play-In + Rds 1-4</a:t>
+              <a:t>05/19-06/01			Conference Finals</a:t>
             </a:r>
           </a:p>
           <a:p>
@@ -10626,325 +7329,17 @@
                 <a:ea typeface="+mn-ea"/>
                 <a:cs typeface="+mn-cs"/>
               </a:rPr>
-              <a:t>04/03-04/05		Women’s Semis + Champ</a:t>
-            </a:r>
-          </a:p>
-          <a:p>
-            <a:pPr marL="0" marR="0" lvl="0" indent="0" algn="l" defTabSz="91440" rtl="0" eaLnBrk="1" fontAlgn="auto" latinLnBrk="0" hangingPunct="1">
-              <a:lnSpc>
-                <a:spcPts val="1200"/>
-              </a:lnSpc>
-              <a:spcBef>
-                <a:spcPts val="300"/>
-              </a:spcBef>
-              <a:spcAft>
-                <a:spcPts val="0"/>
-              </a:spcAft>
-              <a:buClrTx/>
-              <a:buSzTx/>
-              <a:buFont typeface="Arial" panose="020B0604020202020204" pitchFamily="34" charset="0"/>
-              <a:buNone/>
-              <a:tabLst/>
-              <a:defRPr/>
-            </a:pPr>
-            <a:r>
-              <a:rPr kumimoji="0" lang="en-US" sz="1200" b="0" i="0" u="none" strike="noStrike" kern="1200" cap="none" spc="0" normalizeH="0" baseline="0" noProof="0" dirty="0">
-                <a:ln>
-                  <a:noFill/>
-                </a:ln>
-                <a:solidFill>
-                  <a:srgbClr val="FFFFFF"/>
-                </a:solidFill>
-                <a:effectLst/>
-                <a:uLnTx/>
-                <a:uFillTx/>
-                <a:latin typeface="Spectrum Sans Book" panose="02110004020202020204"/>
-                <a:ea typeface="+mn-ea"/>
-                <a:cs typeface="+mn-cs"/>
-              </a:rPr>
-              <a:t>04/04-04/06		Men’s Semis + Championship</a:t>
+              <a:t>06/04-06/21			NBA Finals (in Spanish)</a:t>
             </a:r>
           </a:p>
         </p:txBody>
       </p:sp>
-      <p:grpSp>
-        <p:nvGrpSpPr>
-          <p:cNvPr id="12" name="Group 11">
+      <p:sp>
+        <p:nvSpPr>
+          <p:cNvPr id="17" name="Text Placeholder 5">
             <a:extLst>
               <a:ext uri="{FF2B5EF4-FFF2-40B4-BE49-F238E27FC236}">
-                <a16:creationId xmlns:a16="http://schemas.microsoft.com/office/drawing/2014/main" id="{F51CE5CD-C79C-A124-A87A-83AAA3712E85}"/>
-              </a:ext>
-            </a:extLst>
-          </p:cNvPr>
-          <p:cNvGrpSpPr/>
-          <p:nvPr/>
-        </p:nvGrpSpPr>
-        <p:grpSpPr>
-          <a:xfrm>
-            <a:off x="8553297" y="902561"/>
-            <a:ext cx="3078253" cy="1046697"/>
-            <a:chOff x="7888848" y="4925600"/>
-            <a:chExt cx="3078253" cy="1046697"/>
-          </a:xfrm>
-        </p:grpSpPr>
-        <p:pic>
-          <p:nvPicPr>
-            <p:cNvPr id="17" name="Picture 16" descr="A white text on a black background&#10;&#10;Description automatically generated">
-              <a:extLst>
-                <a:ext uri="{FF2B5EF4-FFF2-40B4-BE49-F238E27FC236}">
-                  <a16:creationId xmlns:a16="http://schemas.microsoft.com/office/drawing/2014/main" id="{99BA483F-136E-2543-2159-4AB077AD87B5}"/>
-                </a:ext>
-              </a:extLst>
-            </p:cNvPr>
-            <p:cNvPicPr>
-              <a:picLocks noChangeAspect="1"/>
-            </p:cNvPicPr>
-            <p:nvPr/>
-          </p:nvPicPr>
-          <p:blipFill rotWithShape="1">
-            <a:blip r:embed="rId3"/>
-            <a:srcRect t="30095" b="31753"/>
-            <a:stretch/>
-          </p:blipFill>
-          <p:spPr>
-            <a:xfrm>
-              <a:off x="7888848" y="5615682"/>
-              <a:ext cx="898775" cy="274320"/>
-            </a:xfrm>
-            <a:prstGeom prst="rect">
-              <a:avLst/>
-            </a:prstGeom>
-          </p:spPr>
-        </p:pic>
-        <p:pic>
-          <p:nvPicPr>
-            <p:cNvPr id="18" name="Picture 17" descr="A white text on a black background&#10;&#10;Description automatically generated">
-              <a:extLst>
-                <a:ext uri="{FF2B5EF4-FFF2-40B4-BE49-F238E27FC236}">
-                  <a16:creationId xmlns:a16="http://schemas.microsoft.com/office/drawing/2014/main" id="{EE23EBC8-6BF3-7775-A94A-1AE9CF026B43}"/>
-                </a:ext>
-              </a:extLst>
-            </p:cNvPr>
-            <p:cNvPicPr>
-              <a:picLocks noChangeAspect="1"/>
-            </p:cNvPicPr>
-            <p:nvPr/>
-          </p:nvPicPr>
-          <p:blipFill rotWithShape="1">
-            <a:blip r:embed="rId4"/>
-            <a:srcRect t="35324" b="36659"/>
-            <a:stretch/>
-          </p:blipFill>
-          <p:spPr>
-            <a:xfrm>
-              <a:off x="8933291" y="5650365"/>
-              <a:ext cx="914400" cy="204954"/>
-            </a:xfrm>
-            <a:prstGeom prst="rect">
-              <a:avLst/>
-            </a:prstGeom>
-          </p:spPr>
-        </p:pic>
-        <p:pic>
-          <p:nvPicPr>
-            <p:cNvPr id="19" name="Picture 18" descr="A red and white logo&#10;&#10;Description automatically generated">
-              <a:extLst>
-                <a:ext uri="{FF2B5EF4-FFF2-40B4-BE49-F238E27FC236}">
-                  <a16:creationId xmlns:a16="http://schemas.microsoft.com/office/drawing/2014/main" id="{78F894D8-CFB3-ACF2-C6E1-2070A2A16651}"/>
-                </a:ext>
-              </a:extLst>
-            </p:cNvPr>
-            <p:cNvPicPr>
-              <a:picLocks noChangeAspect="1"/>
-            </p:cNvPicPr>
-            <p:nvPr/>
-          </p:nvPicPr>
-          <p:blipFill>
-            <a:blip r:embed="rId5"/>
-            <a:stretch>
-              <a:fillRect/>
-            </a:stretch>
-          </p:blipFill>
-          <p:spPr>
-            <a:xfrm>
-              <a:off x="10602129" y="5569961"/>
-              <a:ext cx="364972" cy="365760"/>
-            </a:xfrm>
-            <a:prstGeom prst="rect">
-              <a:avLst/>
-            </a:prstGeom>
-          </p:spPr>
-        </p:pic>
-        <p:pic>
-          <p:nvPicPr>
-            <p:cNvPr id="20" name="Picture 19">
-              <a:extLst>
-                <a:ext uri="{FF2B5EF4-FFF2-40B4-BE49-F238E27FC236}">
-                  <a16:creationId xmlns:a16="http://schemas.microsoft.com/office/drawing/2014/main" id="{06787D5A-F37C-B38B-9F71-CE2E503B7458}"/>
-                </a:ext>
-              </a:extLst>
-            </p:cNvPr>
-            <p:cNvPicPr>
-              <a:picLocks noChangeAspect="1"/>
-            </p:cNvPicPr>
-            <p:nvPr/>
-          </p:nvPicPr>
-          <p:blipFill>
-            <a:blip r:embed="rId6">
-              <a:extLst>
-                <a:ext uri="{28A0092B-C50C-407E-A947-70E740481C1C}">
-                  <a14:useLocalDpi xmlns:a14="http://schemas.microsoft.com/office/drawing/2010/main" val="0"/>
-                </a:ext>
-              </a:extLst>
-            </a:blip>
-            <a:stretch>
-              <a:fillRect/>
-            </a:stretch>
-          </p:blipFill>
-          <p:spPr>
-            <a:xfrm>
-              <a:off x="10600125" y="5017523"/>
-              <a:ext cx="365760" cy="365760"/>
-            </a:xfrm>
-            <a:prstGeom prst="rect">
-              <a:avLst/>
-            </a:prstGeom>
-            <a:effectLst>
-              <a:outerShdw blurRad="50800" dist="38100" dir="2700000" algn="tl" rotWithShape="0">
-                <a:prstClr val="black">
-                  <a:alpha val="40000"/>
-                </a:prstClr>
-              </a:outerShdw>
-            </a:effectLst>
-          </p:spPr>
-        </p:pic>
-        <p:pic>
-          <p:nvPicPr>
-            <p:cNvPr id="21" name="Picture 20" descr="A black and white logo&#10;&#10;Description automatically generated">
-              <a:extLst>
-                <a:ext uri="{FF2B5EF4-FFF2-40B4-BE49-F238E27FC236}">
-                  <a16:creationId xmlns:a16="http://schemas.microsoft.com/office/drawing/2014/main" id="{8533AC2E-452D-5377-FC78-4DFF56BA5F1C}"/>
-                </a:ext>
-              </a:extLst>
-            </p:cNvPr>
-            <p:cNvPicPr>
-              <a:picLocks noChangeAspect="1"/>
-            </p:cNvPicPr>
-            <p:nvPr/>
-          </p:nvPicPr>
-          <p:blipFill>
-            <a:blip r:embed="rId7"/>
-            <a:stretch>
-              <a:fillRect/>
-            </a:stretch>
-          </p:blipFill>
-          <p:spPr>
-            <a:xfrm>
-              <a:off x="7911503" y="4925600"/>
-              <a:ext cx="685800" cy="548640"/>
-            </a:xfrm>
-            <a:prstGeom prst="rect">
-              <a:avLst/>
-            </a:prstGeom>
-          </p:spPr>
-        </p:pic>
-        <p:pic>
-          <p:nvPicPr>
-            <p:cNvPr id="22" name="Picture 21" descr="A black and white logo&#10;&#10;Description automatically generated">
-              <a:extLst>
-                <a:ext uri="{FF2B5EF4-FFF2-40B4-BE49-F238E27FC236}">
-                  <a16:creationId xmlns:a16="http://schemas.microsoft.com/office/drawing/2014/main" id="{800579E9-725C-27ED-AC7A-AC7295AEB0ED}"/>
-                </a:ext>
-              </a:extLst>
-            </p:cNvPr>
-            <p:cNvPicPr>
-              <a:picLocks noChangeAspect="1"/>
-            </p:cNvPicPr>
-            <p:nvPr/>
-          </p:nvPicPr>
-          <p:blipFill>
-            <a:blip r:embed="rId8"/>
-            <a:stretch>
-              <a:fillRect/>
-            </a:stretch>
-          </p:blipFill>
-          <p:spPr>
-            <a:xfrm>
-              <a:off x="8894482" y="4938541"/>
-              <a:ext cx="640080" cy="512064"/>
-            </a:xfrm>
-            <a:prstGeom prst="rect">
-              <a:avLst/>
-            </a:prstGeom>
-          </p:spPr>
-        </p:pic>
-        <p:pic>
-          <p:nvPicPr>
-            <p:cNvPr id="23" name="Picture 22" descr="A black and white logo&#10;&#10;Description automatically generated">
-              <a:extLst>
-                <a:ext uri="{FF2B5EF4-FFF2-40B4-BE49-F238E27FC236}">
-                  <a16:creationId xmlns:a16="http://schemas.microsoft.com/office/drawing/2014/main" id="{F914D1BB-54D1-5082-2585-A811E5BDCA41}"/>
-                </a:ext>
-              </a:extLst>
-            </p:cNvPr>
-            <p:cNvPicPr>
-              <a:picLocks noChangeAspect="1"/>
-            </p:cNvPicPr>
-            <p:nvPr/>
-          </p:nvPicPr>
-          <p:blipFill>
-            <a:blip r:embed="rId9"/>
-            <a:stretch>
-              <a:fillRect/>
-            </a:stretch>
-          </p:blipFill>
-          <p:spPr>
-            <a:xfrm>
-              <a:off x="9698563" y="4927477"/>
-              <a:ext cx="685800" cy="548640"/>
-            </a:xfrm>
-            <a:prstGeom prst="rect">
-              <a:avLst/>
-            </a:prstGeom>
-          </p:spPr>
-        </p:pic>
-        <p:pic>
-          <p:nvPicPr>
-            <p:cNvPr id="24" name="Picture 23" descr="A black and white logo&#10;&#10;Description automatically generated">
-              <a:extLst>
-                <a:ext uri="{FF2B5EF4-FFF2-40B4-BE49-F238E27FC236}">
-                  <a16:creationId xmlns:a16="http://schemas.microsoft.com/office/drawing/2014/main" id="{19C186C1-BCD2-E8F8-7CCB-AC05AB80D5C2}"/>
-                </a:ext>
-              </a:extLst>
-            </p:cNvPr>
-            <p:cNvPicPr>
-              <a:picLocks noChangeAspect="1"/>
-            </p:cNvPicPr>
-            <p:nvPr/>
-          </p:nvPicPr>
-          <p:blipFill>
-            <a:blip r:embed="rId10"/>
-            <a:stretch>
-              <a:fillRect/>
-            </a:stretch>
-          </p:blipFill>
-          <p:spPr>
-            <a:xfrm>
-              <a:off x="9929000" y="5533385"/>
-              <a:ext cx="548640" cy="438912"/>
-            </a:xfrm>
-            <a:prstGeom prst="rect">
-              <a:avLst/>
-            </a:prstGeom>
-          </p:spPr>
-        </p:pic>
-      </p:grpSp>
-      <p:sp>
-        <p:nvSpPr>
-          <p:cNvPr id="26" name="Text Placeholder 5">
-            <a:extLst>
-              <a:ext uri="{FF2B5EF4-FFF2-40B4-BE49-F238E27FC236}">
-                <a16:creationId xmlns:a16="http://schemas.microsoft.com/office/drawing/2014/main" id="{7BA871CE-F8ED-1392-8A2E-7FFB2D6069D0}"/>
+                <a16:creationId xmlns:a16="http://schemas.microsoft.com/office/drawing/2014/main" id="{9CB1957C-053A-A68F-5B93-8359848CBDD7}"/>
               </a:ext>
             </a:extLst>
           </p:cNvPr>
@@ -11217,8 +7612,45 @@
                 <a:ea typeface="+mn-ea"/>
                 <a:cs typeface="Spectrum Sans Book" panose="020B0402020503020304" pitchFamily="34" charset="0"/>
               </a:rPr>
-              <a:t>NCAA Basketball Tourney</a:t>
+              <a:t>NBA </a:t>
             </a:r>
+            <a:r>
+              <a:rPr lang="en-US" sz="4000" b="1" dirty="0">
+                <a:solidFill>
+                  <a:srgbClr val="D5D5D5"/>
+                </a:solidFill>
+                <a:effectLst>
+                  <a:outerShdw blurRad="63500" dist="38100" dir="2700000" algn="tl">
+                    <a:srgbClr val="000000">
+                      <a:alpha val="40000"/>
+                    </a:srgbClr>
+                  </a:outerShdw>
+                </a:effectLst>
+                <a:latin typeface="Spectrum Sans Bold" panose="02110004020202020204"/>
+                <a:cs typeface="Spectrum Sans Book" panose="020B0402020503020304" pitchFamily="34" charset="0"/>
+              </a:rPr>
+              <a:t>Playoffs</a:t>
+            </a:r>
+            <a:endParaRPr kumimoji="0" lang="en-US" sz="4000" b="1" i="0" u="none" strike="noStrike" kern="1200" cap="none" spc="0" normalizeH="0" baseline="0" noProof="0" dirty="0">
+              <a:ln>
+                <a:noFill/>
+              </a:ln>
+              <a:solidFill>
+                <a:srgbClr val="D5D5D5"/>
+              </a:solidFill>
+              <a:effectLst>
+                <a:outerShdw blurRad="63500" dist="38100" dir="2700000" algn="tl">
+                  <a:srgbClr val="000000">
+                    <a:alpha val="40000"/>
+                  </a:srgbClr>
+                </a:outerShdw>
+              </a:effectLst>
+              <a:uLnTx/>
+              <a:uFillTx/>
+              <a:latin typeface="Spectrum Sans Bold" panose="02110004020202020204"/>
+              <a:ea typeface="+mn-ea"/>
+              <a:cs typeface="Spectrum Sans Book" panose="020B0402020503020304" pitchFamily="34" charset="0"/>
+            </a:endParaRPr>
           </a:p>
         </p:txBody>
       </p:sp>
@@ -11227,7 +7659,7 @@
           <p:cNvPr id="11" name="Rectangle 10">
             <a:extLst>
               <a:ext uri="{FF2B5EF4-FFF2-40B4-BE49-F238E27FC236}">
-                <a16:creationId xmlns:a16="http://schemas.microsoft.com/office/drawing/2014/main" id="{B82D9EF6-B1E2-1998-F0CF-75A60B374DE6}"/>
+                <a16:creationId xmlns:a16="http://schemas.microsoft.com/office/drawing/2014/main" id="{FA4B39B0-FAE5-275B-EDC3-A3EF2FF0DFDC}"/>
               </a:ext>
             </a:extLst>
           </p:cNvPr>
@@ -11882,39 +8314,222 @@
           </a:p>
         </p:txBody>
       </p:sp>
-      <p:pic>
-        <p:nvPicPr>
-          <p:cNvPr id="2" name="Picture 1">
+      <p:grpSp>
+        <p:nvGrpSpPr>
+          <p:cNvPr id="21" name="Group 20">
             <a:extLst>
               <a:ext uri="{FF2B5EF4-FFF2-40B4-BE49-F238E27FC236}">
-                <a16:creationId xmlns:a16="http://schemas.microsoft.com/office/drawing/2014/main" id="{FD090552-123B-CD02-E542-695900A18A04}"/>
+                <a16:creationId xmlns:a16="http://schemas.microsoft.com/office/drawing/2014/main" id="{1C3A98B9-3A2C-2297-8800-1E4D86D1B674}"/>
               </a:ext>
             </a:extLst>
           </p:cNvPr>
-          <p:cNvPicPr>
-            <a:picLocks noChangeAspect="1"/>
-          </p:cNvPicPr>
+          <p:cNvGrpSpPr/>
           <p:nvPr/>
-        </p:nvPicPr>
-        <p:blipFill>
-          <a:blip r:embed="rId11"/>
-          <a:srcRect/>
-          <a:stretch/>
-        </p:blipFill>
-        <p:spPr>
+        </p:nvGrpSpPr>
+        <p:grpSpPr>
           <a:xfrm>
-            <a:off x="7677532" y="6491338"/>
-            <a:ext cx="2729478" cy="207565"/>
+            <a:off x="8694550" y="922822"/>
+            <a:ext cx="2782852" cy="1056537"/>
+            <a:chOff x="8665513" y="955979"/>
+            <a:chExt cx="2782852" cy="1056537"/>
           </a:xfrm>
-          <a:prstGeom prst="rect">
-            <a:avLst/>
-          </a:prstGeom>
-        </p:spPr>
-      </p:pic>
+        </p:grpSpPr>
+        <p:pic>
+          <p:nvPicPr>
+            <p:cNvPr id="22" name="Picture 21">
+              <a:extLst>
+                <a:ext uri="{FF2B5EF4-FFF2-40B4-BE49-F238E27FC236}">
+                  <a16:creationId xmlns:a16="http://schemas.microsoft.com/office/drawing/2014/main" id="{DA2BBB22-1EA8-0FE8-BB14-54B4042C349C}"/>
+                </a:ext>
+              </a:extLst>
+            </p:cNvPr>
+            <p:cNvPicPr>
+              <a:picLocks noChangeAspect="1"/>
+            </p:cNvPicPr>
+            <p:nvPr/>
+          </p:nvPicPr>
+          <p:blipFill>
+            <a:blip r:embed="rId3">
+              <a:extLst>
+                <a:ext uri="{28A0092B-C50C-407E-A947-70E740481C1C}">
+                  <a14:useLocalDpi xmlns:a14="http://schemas.microsoft.com/office/drawing/2010/main" val="0"/>
+                </a:ext>
+              </a:extLst>
+            </a:blip>
+            <a:stretch>
+              <a:fillRect/>
+            </a:stretch>
+          </p:blipFill>
+          <p:spPr>
+            <a:xfrm>
+              <a:off x="10504347" y="1555316"/>
+              <a:ext cx="365760" cy="365760"/>
+            </a:xfrm>
+            <a:prstGeom prst="rect">
+              <a:avLst/>
+            </a:prstGeom>
+            <a:effectLst>
+              <a:outerShdw blurRad="50800" dist="38100" dir="2700000" algn="tl" rotWithShape="0">
+                <a:prstClr val="black">
+                  <a:alpha val="40000"/>
+                </a:prstClr>
+              </a:outerShdw>
+            </a:effectLst>
+          </p:spPr>
+        </p:pic>
+        <p:pic>
+          <p:nvPicPr>
+            <p:cNvPr id="23" name="Picture 22" descr="A white text on a black background&#10;&#10;Description automatically generated">
+              <a:extLst>
+                <a:ext uri="{FF2B5EF4-FFF2-40B4-BE49-F238E27FC236}">
+                  <a16:creationId xmlns:a16="http://schemas.microsoft.com/office/drawing/2014/main" id="{2B737D43-650F-8C3E-8E06-FCAB6326E23D}"/>
+                </a:ext>
+              </a:extLst>
+            </p:cNvPr>
+            <p:cNvPicPr>
+              <a:picLocks noChangeAspect="1"/>
+            </p:cNvPicPr>
+            <p:nvPr/>
+          </p:nvPicPr>
+          <p:blipFill rotWithShape="1">
+            <a:blip r:embed="rId4"/>
+            <a:srcRect t="30095" b="31753"/>
+            <a:stretch/>
+          </p:blipFill>
+          <p:spPr>
+            <a:xfrm>
+              <a:off x="8665513" y="1076241"/>
+              <a:ext cx="898775" cy="274320"/>
+            </a:xfrm>
+            <a:prstGeom prst="rect">
+              <a:avLst/>
+            </a:prstGeom>
+          </p:spPr>
+        </p:pic>
+        <p:pic>
+          <p:nvPicPr>
+            <p:cNvPr id="24" name="Picture 23" descr="A white text on a black background&#10;&#10;Description automatically generated">
+              <a:extLst>
+                <a:ext uri="{FF2B5EF4-FFF2-40B4-BE49-F238E27FC236}">
+                  <a16:creationId xmlns:a16="http://schemas.microsoft.com/office/drawing/2014/main" id="{8ACFE9D0-AFE5-7235-7AEB-6C81CACB8398}"/>
+                </a:ext>
+              </a:extLst>
+            </p:cNvPr>
+            <p:cNvPicPr>
+              <a:picLocks noChangeAspect="1"/>
+            </p:cNvPicPr>
+            <p:nvPr/>
+          </p:nvPicPr>
+          <p:blipFill rotWithShape="1">
+            <a:blip r:embed="rId5"/>
+            <a:srcRect t="35324" b="36659"/>
+            <a:stretch/>
+          </p:blipFill>
+          <p:spPr>
+            <a:xfrm>
+              <a:off x="9701762" y="1122204"/>
+              <a:ext cx="914400" cy="204954"/>
+            </a:xfrm>
+            <a:prstGeom prst="rect">
+              <a:avLst/>
+            </a:prstGeom>
+          </p:spPr>
+        </p:pic>
+        <p:pic>
+          <p:nvPicPr>
+            <p:cNvPr id="25" name="Picture 24" descr="A red and white logo&#10;&#10;Description automatically generated">
+              <a:extLst>
+                <a:ext uri="{FF2B5EF4-FFF2-40B4-BE49-F238E27FC236}">
+                  <a16:creationId xmlns:a16="http://schemas.microsoft.com/office/drawing/2014/main" id="{C9CD4E2E-F5FE-678A-18D3-CE4F6133A8F8}"/>
+                </a:ext>
+              </a:extLst>
+            </p:cNvPr>
+            <p:cNvPicPr>
+              <a:picLocks noChangeAspect="1"/>
+            </p:cNvPicPr>
+            <p:nvPr/>
+          </p:nvPicPr>
+          <p:blipFill>
+            <a:blip r:embed="rId6"/>
+            <a:stretch>
+              <a:fillRect/>
+            </a:stretch>
+          </p:blipFill>
+          <p:spPr>
+            <a:xfrm>
+              <a:off x="9935699" y="1555316"/>
+              <a:ext cx="364972" cy="365760"/>
+            </a:xfrm>
+            <a:prstGeom prst="rect">
+              <a:avLst/>
+            </a:prstGeom>
+          </p:spPr>
+        </p:pic>
+        <p:pic>
+          <p:nvPicPr>
+            <p:cNvPr id="26" name="Picture 25" descr="A white text on a black background&#10;&#10;Description automatically generated">
+              <a:extLst>
+                <a:ext uri="{FF2B5EF4-FFF2-40B4-BE49-F238E27FC236}">
+                  <a16:creationId xmlns:a16="http://schemas.microsoft.com/office/drawing/2014/main" id="{5BEC482B-9232-1259-2D43-E05D30E4296D}"/>
+                </a:ext>
+              </a:extLst>
+            </p:cNvPr>
+            <p:cNvPicPr>
+              <a:picLocks noChangeAspect="1"/>
+            </p:cNvPicPr>
+            <p:nvPr/>
+          </p:nvPicPr>
+          <p:blipFill>
+            <a:blip r:embed="rId7"/>
+            <a:stretch>
+              <a:fillRect/>
+            </a:stretch>
+          </p:blipFill>
+          <p:spPr>
+            <a:xfrm>
+              <a:off x="10762565" y="955979"/>
+              <a:ext cx="685800" cy="548640"/>
+            </a:xfrm>
+            <a:prstGeom prst="rect">
+              <a:avLst/>
+            </a:prstGeom>
+          </p:spPr>
+        </p:pic>
+        <p:pic>
+          <p:nvPicPr>
+            <p:cNvPr id="27" name="Picture 26" descr="A logo with a person holding a ball&#10;&#10;Description automatically generated">
+              <a:extLst>
+                <a:ext uri="{FF2B5EF4-FFF2-40B4-BE49-F238E27FC236}">
+                  <a16:creationId xmlns:a16="http://schemas.microsoft.com/office/drawing/2014/main" id="{83E4D337-51C7-4457-2D69-B98E47656E04}"/>
+                </a:ext>
+              </a:extLst>
+            </p:cNvPr>
+            <p:cNvPicPr>
+              <a:picLocks noChangeAspect="1"/>
+            </p:cNvPicPr>
+            <p:nvPr/>
+          </p:nvPicPr>
+          <p:blipFill>
+            <a:blip r:embed="rId8"/>
+            <a:stretch>
+              <a:fillRect/>
+            </a:stretch>
+          </p:blipFill>
+          <p:spPr>
+            <a:xfrm>
+              <a:off x="9046223" y="1463876"/>
+              <a:ext cx="685800" cy="548640"/>
+            </a:xfrm>
+            <a:prstGeom prst="rect">
+              <a:avLst/>
+            </a:prstGeom>
+          </p:spPr>
+        </p:pic>
+      </p:grpSp>
     </p:spTree>
     <p:extLst>
       <p:ext uri="{BB962C8B-B14F-4D97-AF65-F5344CB8AC3E}">
-        <p14:creationId xmlns:p14="http://schemas.microsoft.com/office/powerpoint/2010/main" val="1065980393"/>
+        <p14:creationId xmlns:p14="http://schemas.microsoft.com/office/powerpoint/2010/main" val="150908192"/>
       </p:ext>
     </p:extLst>
   </p:cSld>
@@ -13923,36 +10538,8 @@
 </file>
 
 <file path=customXml/item1.xml><?xml version="1.0" encoding="utf-8"?>
-<p:properties xmlns:p="http://schemas.microsoft.com/office/2006/metadata/properties" xmlns:xsi="http://www.w3.org/2001/XMLSchema-instance" xmlns:pc="http://schemas.microsoft.com/office/infopath/2007/PartnerControls">
-  <documentManagement>
-    <TaxCatchAll xmlns="a0547eee-aaa8-4b90-a1b8-3c540830c94d" xsi:nil="true"/>
-    <j54b65ba43ff43c48723fc8adc29d268 xmlns="a0547eee-aaa8-4b90-a1b8-3c540830c94d">
-      <Terms xmlns="http://schemas.microsoft.com/office/infopath/2007/PartnerControls"/>
-    </j54b65ba43ff43c48723fc8adc29d268>
-    <l420c45215364e2eb38c14ab041199ab xmlns="a0547eee-aaa8-4b90-a1b8-3c540830c94d">
-      <Terms xmlns="http://schemas.microsoft.com/office/infopath/2007/PartnerControls"/>
-    </l420c45215364e2eb38c14ab041199ab>
-    <la4ae81035174b1fba751a07ca4d086b xmlns="a0547eee-aaa8-4b90-a1b8-3c540830c94d">
-      <Terms xmlns="http://schemas.microsoft.com/office/infopath/2007/PartnerControls"/>
-    </la4ae81035174b1fba751a07ca4d086b>
-    <_dlc_DocIdPersistId xmlns="a0547eee-aaa8-4b90-a1b8-3c540830c94d" xsi:nil="true"/>
-    <SROwner xmlns="a0547eee-aaa8-4b90-a1b8-3c540830c94d">
-      <UserInfo>
-        <DisplayName/>
-        <AccountId xsi:nil="true"/>
-        <AccountType/>
-      </UserInfo>
-    </SROwner>
-    <SRRenewal xmlns="a0547eee-aaa8-4b90-a1b8-3c540830c94d" xsi:nil="true"/>
-    <j7c24873d3bf4df793fceec9ac332839 xmlns="a0547eee-aaa8-4b90-a1b8-3c540830c94d">
-      <Terms xmlns="http://schemas.microsoft.com/office/infopath/2007/PartnerControls"/>
-    </j7c24873d3bf4df793fceec9ac332839>
-    <SRThumbnail xmlns="a0547eee-aaa8-4b90-a1b8-3c540830c94d">
-      <Url xsi:nil="true"/>
-      <Description xsi:nil="true"/>
-    </SRThumbnail>
-  </documentManagement>
-</p:properties>
+<?mso-contentType ?>
+<spe:Receivers xmlns:spe="http://schemas.microsoft.com/sharepoint/events"/>
 </file>
 
 <file path=customXml/item2.xml><?xml version="1.0" encoding="utf-8"?>
@@ -13961,11 +10548,6 @@
 </file>
 
 <file path=customXml/item3.xml><?xml version="1.0" encoding="utf-8"?>
-<?mso-contentType ?>
-<spe:Receivers xmlns:spe="http://schemas.microsoft.com/sharepoint/events"/>
-</file>
-
-<file path=customXml/item4.xml><?xml version="1.0" encoding="utf-8"?>
 <ct:contentTypeSchema xmlns:ct="http://schemas.microsoft.com/office/2006/metadata/contentType" xmlns:ma="http://schemas.microsoft.com/office/2006/metadata/properties/metaAttributes" ct:_="" ma:_="" ma:contentTypeName="SR Document" ma:contentTypeID="0x0101004498840A4C114E46B8C4ECA211F55C5E00E2F44E5BC511894F8C93D74DA4B18249" ma:contentTypeVersion="44" ma:contentTypeDescription="" ma:contentTypeScope="" ma:versionID="fd16523f0abdae274e19cd71c6bde544">
   <xsd:schema xmlns:xsd="http://www.w3.org/2001/XMLSchema" xmlns:xs="http://www.w3.org/2001/XMLSchema" xmlns:p="http://schemas.microsoft.com/office/2006/metadata/properties" xmlns:ns2="a0547eee-aaa8-4b90-a1b8-3c540830c94d" xmlns:ns3="d9991e3c-4de5-4956-8de4-c71c59ac3722" targetNamespace="http://schemas.microsoft.com/office/2006/metadata/properties" ma:root="true" ma:fieldsID="134456c98559cfd421d305b01f0f49fc" ns2:_="" ns3:_="">
     <xsd:import namespace="a0547eee-aaa8-4b90-a1b8-3c540830c94d"/>
@@ -14236,7 +10818,75 @@
 </ct:contentTypeSchema>
 </file>
 
+<file path=customXml/item4.xml><?xml version="1.0" encoding="utf-8"?>
+<p:properties xmlns:p="http://schemas.microsoft.com/office/2006/metadata/properties" xmlns:xsi="http://www.w3.org/2001/XMLSchema-instance" xmlns:pc="http://schemas.microsoft.com/office/infopath/2007/PartnerControls">
+  <documentManagement>
+    <TaxCatchAll xmlns="a0547eee-aaa8-4b90-a1b8-3c540830c94d" xsi:nil="true"/>
+    <j54b65ba43ff43c48723fc8adc29d268 xmlns="a0547eee-aaa8-4b90-a1b8-3c540830c94d">
+      <Terms xmlns="http://schemas.microsoft.com/office/infopath/2007/PartnerControls"/>
+    </j54b65ba43ff43c48723fc8adc29d268>
+    <l420c45215364e2eb38c14ab041199ab xmlns="a0547eee-aaa8-4b90-a1b8-3c540830c94d">
+      <Terms xmlns="http://schemas.microsoft.com/office/infopath/2007/PartnerControls"/>
+    </l420c45215364e2eb38c14ab041199ab>
+    <la4ae81035174b1fba751a07ca4d086b xmlns="a0547eee-aaa8-4b90-a1b8-3c540830c94d">
+      <Terms xmlns="http://schemas.microsoft.com/office/infopath/2007/PartnerControls"/>
+    </la4ae81035174b1fba751a07ca4d086b>
+    <_dlc_DocIdPersistId xmlns="a0547eee-aaa8-4b90-a1b8-3c540830c94d" xsi:nil="true"/>
+    <SROwner xmlns="a0547eee-aaa8-4b90-a1b8-3c540830c94d">
+      <UserInfo>
+        <DisplayName/>
+        <AccountId xsi:nil="true"/>
+        <AccountType/>
+      </UserInfo>
+    </SROwner>
+    <SRRenewal xmlns="a0547eee-aaa8-4b90-a1b8-3c540830c94d" xsi:nil="true"/>
+    <j7c24873d3bf4df793fceec9ac332839 xmlns="a0547eee-aaa8-4b90-a1b8-3c540830c94d">
+      <Terms xmlns="http://schemas.microsoft.com/office/infopath/2007/PartnerControls"/>
+    </j7c24873d3bf4df793fceec9ac332839>
+    <SRThumbnail xmlns="a0547eee-aaa8-4b90-a1b8-3c540830c94d">
+      <Url xsi:nil="true"/>
+      <Description xsi:nil="true"/>
+    </SRThumbnail>
+  </documentManagement>
+</p:properties>
+</file>
+
 <file path=customXml/itemProps1.xml><?xml version="1.0" encoding="utf-8"?>
+<ds:datastoreItem xmlns:ds="http://schemas.openxmlformats.org/officeDocument/2006/customXml" ds:itemID="{020E764C-296D-40F1-B4A5-CAEC833EF05C}">
+  <ds:schemaRefs>
+    <ds:schemaRef ds:uri="http://schemas.microsoft.com/sharepoint/events"/>
+  </ds:schemaRefs>
+</ds:datastoreItem>
+</file>
+
+<file path=customXml/itemProps2.xml><?xml version="1.0" encoding="utf-8"?>
+<ds:datastoreItem xmlns:ds="http://schemas.openxmlformats.org/officeDocument/2006/customXml" ds:itemID="{EC52D6D2-615C-42E8-A3C5-D765C3285355}">
+  <ds:schemaRefs>
+    <ds:schemaRef ds:uri="http://schemas.microsoft.com/sharepoint/v3/contenttype/forms"/>
+  </ds:schemaRefs>
+</ds:datastoreItem>
+</file>
+
+<file path=customXml/itemProps3.xml><?xml version="1.0" encoding="utf-8"?>
+<ds:datastoreItem xmlns:ds="http://schemas.openxmlformats.org/officeDocument/2006/customXml" ds:itemID="{12B3C130-8141-496F-8BE5-9CF1D14628D4}">
+  <ds:schemaRefs>
+    <ds:schemaRef ds:uri="http://schemas.microsoft.com/office/2006/metadata/contentType"/>
+    <ds:schemaRef ds:uri="http://schemas.microsoft.com/office/2006/metadata/properties/metaAttributes"/>
+    <ds:schemaRef ds:uri="http://www.w3.org/2001/XMLSchema"/>
+    <ds:schemaRef ds:uri="http://schemas.microsoft.com/office/2006/metadata/properties"/>
+    <ds:schemaRef ds:uri="a0547eee-aaa8-4b90-a1b8-3c540830c94d"/>
+    <ds:schemaRef ds:uri="d9991e3c-4de5-4956-8de4-c71c59ac3722"/>
+    <ds:schemaRef ds:uri="http://schemas.microsoft.com/office/2006/documentManagement/types"/>
+    <ds:schemaRef ds:uri="http://schemas.microsoft.com/office/infopath/2007/PartnerControls"/>
+    <ds:schemaRef ds:uri="http://schemas.openxmlformats.org/package/2006/metadata/core-properties"/>
+    <ds:schemaRef ds:uri="http://purl.org/dc/elements/1.1/"/>
+    <ds:schemaRef ds:uri="http://purl.org/dc/terms/"/>
+    <ds:schemaRef ds:uri="http://schemas.microsoft.com/internal/obd"/>
+  </ds:schemaRefs>
+</ds:datastoreItem>
+</file>
+
+<file path=customXml/itemProps4.xml><?xml version="1.0" encoding="utf-8"?>
 <ds:datastoreItem xmlns:ds="http://schemas.openxmlformats.org/officeDocument/2006/customXml" ds:itemID="{A4A687C3-2BAD-4AD7-9EA3-756AF9ACB115}">
   <ds:schemaRefs>
     <ds:schemaRef ds:uri="http://schemas.microsoft.com/office/2006/metadata/properties"/>
@@ -14254,41 +10904,6 @@
 </ds:datastoreItem>
 </file>
 
-<file path=customXml/itemProps2.xml><?xml version="1.0" encoding="utf-8"?>
-<ds:datastoreItem xmlns:ds="http://schemas.openxmlformats.org/officeDocument/2006/customXml" ds:itemID="{F935B857-3D94-4C17-9CED-92477EFC3544}">
-  <ds:schemaRefs>
-    <ds:schemaRef ds:uri="http://schemas.microsoft.com/sharepoint/v3/contenttype/forms"/>
-  </ds:schemaRefs>
-</ds:datastoreItem>
-</file>
-
-<file path=customXml/itemProps3.xml><?xml version="1.0" encoding="utf-8"?>
-<ds:datastoreItem xmlns:ds="http://schemas.openxmlformats.org/officeDocument/2006/customXml" ds:itemID="{79D0A483-7ADE-4980-AE88-8E5FB9B98F42}">
-  <ds:schemaRefs>
-    <ds:schemaRef ds:uri="http://schemas.microsoft.com/sharepoint/events"/>
-  </ds:schemaRefs>
-</ds:datastoreItem>
-</file>
-
-<file path=customXml/itemProps4.xml><?xml version="1.0" encoding="utf-8"?>
-<ds:datastoreItem xmlns:ds="http://schemas.openxmlformats.org/officeDocument/2006/customXml" ds:itemID="{A4BCF0F5-F8A1-4268-BC58-B16D526F5168}">
-  <ds:schemaRefs>
-    <ds:schemaRef ds:uri="http://schemas.microsoft.com/office/2006/metadata/contentType"/>
-    <ds:schemaRef ds:uri="http://schemas.microsoft.com/office/2006/metadata/properties/metaAttributes"/>
-    <ds:schemaRef ds:uri="http://www.w3.org/2001/XMLSchema"/>
-    <ds:schemaRef ds:uri="http://schemas.microsoft.com/office/2006/metadata/properties"/>
-    <ds:schemaRef ds:uri="a0547eee-aaa8-4b90-a1b8-3c540830c94d"/>
-    <ds:schemaRef ds:uri="d9991e3c-4de5-4956-8de4-c71c59ac3722"/>
-    <ds:schemaRef ds:uri="http://schemas.microsoft.com/office/2006/documentManagement/types"/>
-    <ds:schemaRef ds:uri="http://schemas.microsoft.com/office/infopath/2007/PartnerControls"/>
-    <ds:schemaRef ds:uri="http://schemas.openxmlformats.org/package/2006/metadata/core-properties"/>
-    <ds:schemaRef ds:uri="http://purl.org/dc/elements/1.1/"/>
-    <ds:schemaRef ds:uri="http://purl.org/dc/terms/"/>
-    <ds:schemaRef ds:uri="http://schemas.microsoft.com/internal/obd"/>
-  </ds:schemaRefs>
-</ds:datastoreItem>
-</file>
-
 <file path=docMetadata/LabelInfo.xml><?xml version="1.0" encoding="utf-8"?>
 <clbl:labelList xmlns:clbl="http://schemas.microsoft.com/office/2020/mipLabelMetadata">
   <clbl:label id="{9082f31f-07f9-4a11-acf8-7575926c312d}" enabled="1" method="Privileged" siteId="{c921337c-1160-432a-b079-805f59112843}" removed="0"/>
